--- a/docs/prezentare/current_draft/disertatie_matei_rares_prezentare_main.pptx
+++ b/docs/prezentare/current_draft/disertatie_matei_rares_prezentare_main.pptx
@@ -4959,7 +4959,7 @@
           <a:p>
             <a:fld id="{544D676F-4DB5-46B8-8F00-05DB67D5471C}" type="datetimeFigureOut">
               <a:rPr lang="en-US" smtClean="0"/>
-              <a:t>6/18/2026</a:t>
+              <a:t>6/19/2026</a:t>
             </a:fld>
             <a:endParaRPr lang="en-US" dirty="0"/>
           </a:p>
@@ -5054,102 +5054,6 @@
 </p:handoutMaster>
 </file>
 
-<file path=ppt/ink/ink1.xml><?xml version="1.0" encoding="utf-8"?>
-<inkml:ink xmlns:inkml="http://www.w3.org/2003/InkML">
-  <inkml:definitions>
-    <inkml:context xml:id="ctx0">
-      <inkml:inkSource xml:id="inkSrc0">
-        <inkml:traceFormat>
-          <inkml:channel name="X" type="integer" min="-2.14748E9" max="2.14748E9" units="cm"/>
-          <inkml:channel name="Y" type="integer" min="-2.14748E9" max="2.14748E9" units="cm"/>
-          <inkml:channel name="F" type="integer" max="32767" units="dev"/>
-          <inkml:channel name="OA" type="integer" max="360" units="deg"/>
-          <inkml:channel name="OE" type="integer" max="90" units="deg"/>
-        </inkml:traceFormat>
-        <inkml:channelProperties>
-          <inkml:channelProperty channel="X" name="resolution" value="1000" units="1/cm"/>
-          <inkml:channelProperty channel="Y" name="resolution" value="1000" units="1/cm"/>
-          <inkml:channelProperty channel="F" name="resolution" value="0" units="1/dev"/>
-          <inkml:channelProperty channel="OA" name="resolution" value="1000" units="1/deg"/>
-          <inkml:channelProperty channel="OE" name="resolution" value="1000" units="1/deg"/>
-        </inkml:channelProperties>
-      </inkml:inkSource>
-      <inkml:timestamp xml:id="ts0" timeString="2024-05-17T07:44:30.856"/>
-    </inkml:context>
-    <inkml:brush xml:id="br0">
-      <inkml:brushProperty name="width" value="0.1" units="cm"/>
-      <inkml:brushProperty name="height" value="0.1" units="cm"/>
-      <inkml:brushProperty name="color" value="#94B6D2"/>
-    </inkml:brush>
-  </inkml:definitions>
-  <inkml:trace contextRef="#ctx0" brushRef="#br0">39236 13341 16383 0 0,'0'0'0'0'0,"0"-5"0"0"0,0-13 0 0 0,-1 1 0 0 0,1-4 0 0 0,0 0 0 0 0,0-2 0 0 0,0-4 0 0 0,-1-5 0 0 0,1-3 0 0 0,0 5 0 0 0,-1-1 0 0 0,1 0 0 0 0,0-3 0 0 0,-1-2 0 0 0,1 5 0 0 0,0 0 0 0 0,0 1 0 0 0,-1-3 0 0 0,1-3 0 0 0,0 0 0 0 0,-1-3 0 0 0,1-1 0 0 0,0 0 0 0 0,-1 0 0 0 0,1-2 0 0 0,0 1 0 0 0,-1 1 0 0 0,1 0 0 0 0,-1 0 0 0 0,1 0 0 0 0,0-1 0 0 0,-1 1 0 0 0,1 0 0 0 0,0 0 0 0 0,-2 0 0 0 0,2-1 0 0 0,-1 3 0 0 0,1-2 0 0 0,0 0 0 0 0,-1 5 0 0 0,1 5 0 0 0,0-1 0 0 0,0-1 0 0 0,-1 3 0 0 0,1 0 0 0 0,0 0 0 0 0,0 5 0 0 0,-1-3 0 0 0,1-2 0 0 0,0-2 0 0 0,-1-5 0 0 0,1 0 0 0 0,0-3 0 0 0,-1-1 0 0 0,1 6 0 0 0,0 3 0 0 0,0-1 0 0 0,-1-1 0 0 0,1 4 0 0 0,0 8 0 0 0,0 0 0 0 0,-1-2 0 0 0,1-5 0 0 0,0-5 0 0 0,0 4 0 0 0,-1 1 0 0 0,1-3 0 0 0,0-3 0 0 0,-1-1 0 0 0,1-3 0 0 0,0 0 0 0 0,-2-10 0 0 0,2-2 0 0 0,-1 0 0 0 0,1 4 0 0 0,-1 0 0 0 0,1 2 0 0 0,0 10 0 0 0,-1 1 0 0 0,1 3 0 0 0,0-3 0 0 0,0-1 0 0 0,-1 3 0 0 0,1 10 0 0 0</inkml:trace>
-</inkml:ink>
-</file>
-
-<file path=ppt/ink/ink2.xml><?xml version="1.0" encoding="utf-8"?>
-<inkml:ink xmlns:inkml="http://www.w3.org/2003/InkML">
-  <inkml:definitions>
-    <inkml:context xml:id="ctx0">
-      <inkml:inkSource xml:id="inkSrc0">
-        <inkml:traceFormat>
-          <inkml:channel name="X" type="integer" min="-2.14748E9" max="2.14748E9" units="cm"/>
-          <inkml:channel name="Y" type="integer" min="-2.14748E9" max="2.14748E9" units="cm"/>
-          <inkml:channel name="F" type="integer" max="32767" units="dev"/>
-          <inkml:channel name="OA" type="integer" max="360" units="deg"/>
-          <inkml:channel name="OE" type="integer" max="90" units="deg"/>
-        </inkml:traceFormat>
-        <inkml:channelProperties>
-          <inkml:channelProperty channel="X" name="resolution" value="1000" units="1/cm"/>
-          <inkml:channelProperty channel="Y" name="resolution" value="1000" units="1/cm"/>
-          <inkml:channelProperty channel="F" name="resolution" value="0" units="1/dev"/>
-          <inkml:channelProperty channel="OA" name="resolution" value="1000" units="1/deg"/>
-          <inkml:channelProperty channel="OE" name="resolution" value="1000" units="1/deg"/>
-        </inkml:channelProperties>
-      </inkml:inkSource>
-      <inkml:timestamp xml:id="ts0" timeString="2024-05-19T07:00:30.725"/>
-    </inkml:context>
-    <inkml:brush xml:id="br0">
-      <inkml:brushProperty name="width" value="0.1" units="cm"/>
-      <inkml:brushProperty name="height" value="0.1" units="cm"/>
-      <inkml:brushProperty name="color" value="#E4650E"/>
-    </inkml:brush>
-  </inkml:definitions>
-  <inkml:trace contextRef="#ctx0" brushRef="#br0">39293 14914 16383 0 0,'0'0'0'0'0,"0"-8"0"0"0,0-20 0 0 0,-3 2 0 0 0,3-7 0 0 0,0 0 0 0 0,0-3 0 0 0,0-6 0 0 0,-3-8 0 0 0,3-4 0 0 0,0 7 0 0 0,-3-1 0 0 0,3-1 0 0 0,0-4 0 0 0,-3-3 0 0 0,3 8 0 0 0,0 0 0 0 0,0 1 0 0 0,-3-5 0 0 0,3-4 0 0 0,0 0 0 0 0,-3-5 0 0 0,3-1 0 0 0,0 0 0 0 0,-3-1 0 0 0,3-2 0 0 0,0 1 0 0 0,-3 2 0 0 0,3-1 0 0 0,-4 1 0 0 0,4-1 0 0 0,0 0 0 0 0,-3 0 0 0 0,3 1 0 0 0,0 0 0 0 0,-6-1 0 0 0,6-1 0 0 0,-3 5 0 0 0,3-3 0 0 0,0-1 0 0 0,-3 9 0 0 0,3 7 0 0 0,0-1 0 0 0,0-2 0 0 0,-3 5 0 0 0,3-1 0 0 0,0 1 0 0 0,0 8 0 0 0,-3-5 0 0 0,3-3 0 0 0,0-4 0 0 0,-3-7 0 0 0,3 0 0 0 0,0-5 0 0 0,-3-1 0 0 0,3 9 0 0 0,0 4 0 0 0,0 0 0 0 0,-3-3 0 0 0,3 7 0 0 0,0 12 0 0 0,0 0 0 0 0,-3-2 0 0 0,3-9 0 0 0,0-7 0 0 0,0 5 0 0 0,-3 3 0 0 0,3-6 0 0 0,0-4 0 0 0,-3-1 0 0 0,3-5 0 0 0,0-1 0 0 0,-6-14 0 0 0,6-4 0 0 0,-3 0 0 0 0,3 6 0 0 0,-3 0 0 0 0,3 4 0 0 0,0 15 0 0 0,-3 1 0 0 0,3 5 0 0 0,0-4 0 0 0,0-2 0 0 0,-3 5 0 0 0,3 15 0 0 0</inkml:trace>
-</inkml:ink>
-</file>
-
-<file path=ppt/ink/ink3.xml><?xml version="1.0" encoding="utf-8"?>
-<inkml:ink xmlns:inkml="http://www.w3.org/2003/InkML">
-  <inkml:definitions>
-    <inkml:context xml:id="ctx0">
-      <inkml:inkSource xml:id="inkSrc0">
-        <inkml:traceFormat>
-          <inkml:channel name="X" type="integer" min="-2.14748E9" max="2.14748E9" units="cm"/>
-          <inkml:channel name="Y" type="integer" min="-2.14748E9" max="2.14748E9" units="cm"/>
-          <inkml:channel name="F" type="integer" max="32767" units="dev"/>
-          <inkml:channel name="OA" type="integer" max="360" units="deg"/>
-          <inkml:channel name="OE" type="integer" max="90" units="deg"/>
-        </inkml:traceFormat>
-        <inkml:channelProperties>
-          <inkml:channelProperty channel="X" name="resolution" value="1000" units="1/cm"/>
-          <inkml:channelProperty channel="Y" name="resolution" value="1000" units="1/cm"/>
-          <inkml:channelProperty channel="F" name="resolution" value="0" units="1/dev"/>
-          <inkml:channelProperty channel="OA" name="resolution" value="1000" units="1/deg"/>
-          <inkml:channelProperty channel="OE" name="resolution" value="1000" units="1/deg"/>
-        </inkml:channelProperties>
-      </inkml:inkSource>
-      <inkml:timestamp xml:id="ts0" timeString="2024-05-19T07:01:35.261"/>
-    </inkml:context>
-    <inkml:brush xml:id="br0">
-      <inkml:brushProperty name="width" value="0.1" units="cm"/>
-      <inkml:brushProperty name="height" value="0.1" units="cm"/>
-      <inkml:brushProperty name="color" value="#E4650E"/>
-    </inkml:brush>
-  </inkml:definitions>
-  <inkml:trace contextRef="#ctx0" brushRef="#br0">39462 15082 16383 0 0,'0'0'0'0'0,"0"-8"0"0"0,0-21 0 0 0,-9 2 0 0 0,9-7 0 0 0,0 0 0 0 0,0-4 0 0 0,0-5 0 0 0,-9-9 0 0 0,9-5 0 0 0,0 9 0 0 0,-9-2 0 0 0,9-1 0 0 0,0-4 0 0 0,-9-3 0 0 0,9 8 0 0 0,0 0 0 0 0,0 1 0 0 0,-9-4 0 0 0,9-6 0 0 0,0 1 0 0 0,-9-5 0 0 0,9-2 0 0 0,0 1 0 0 0,-9-1 0 0 0,9-3 0 0 0,0 2 0 0 0,-9 1 0 0 0,9 0 0 0 0,-10 0 0 0 0,10 1 0 0 0,0-3 0 0 0,-9 2 0 0 0,9 1 0 0 0,0-1 0 0 0,-18 0 0 0 0,18-1 0 0 0,-9 4 0 0 0,9-2 0 0 0,0-1 0 0 0,-9 8 0 0 0,9 9 0 0 0,0-3 0 0 0,0 0 0 0 0,-9 4 0 0 0,9 0 0 0 0,0 0 0 0 0,0 8 0 0 0,-9-5 0 0 0,9-3 0 0 0,0-3 0 0 0,-9-8 0 0 0,9 0 0 0 0,0-6 0 0 0,-9 0 0 0 0,9 9 0 0 0,0 5 0 0 0,0-2 0 0 0,-10-2 0 0 0,10 7 0 0 0,0 13 0 0 0,0 0 0 0 0,-9-3 0 0 0,9-8 0 0 0,0-9 0 0 0,0 8 0 0 0,-9 0 0 0 0,9-4 0 0 0,0-5 0 0 0,-9-2 0 0 0,9-4 0 0 0,0-1 0 0 0,-18-15 0 0 0,18-4 0 0 0,-9 0 0 0 0,9 6 0 0 0,-9 1 0 0 0,9 3 0 0 0,0 16 0 0 0,-9 1 0 0 0,9 6 0 0 0,0-6 0 0 0,0-1 0 0 0,-9 5 0 0 0,9 16 0 0 0</inkml:trace>
-</inkml:ink>
-</file>
-
 <file path=ppt/notesMasters/notesMaster1.xml><?xml version="1.0" encoding="utf-8"?>
 <p:notesMaster xmlns:a="http://schemas.openxmlformats.org/drawingml/2006/main" xmlns:r="http://schemas.openxmlformats.org/officeDocument/2006/relationships" xmlns:p="http://schemas.openxmlformats.org/presentationml/2006/main">
   <p:cSld>
@@ -5232,7 +5136,7 @@
           <a:p>
             <a:fld id="{887BE5AB-3192-4552-A220-BA06EA9D867F}" type="datetimeFigureOut">
               <a:rPr lang="en-US" smtClean="0"/>
-              <a:t>6/18/2026</a:t>
+              <a:t>6/19/2026</a:t>
             </a:fld>
             <a:endParaRPr lang="en-US" dirty="0"/>
           </a:p>
@@ -29669,7 +29573,7 @@
         </p:nvSpPr>
         <p:spPr>
           <a:xfrm>
-            <a:off x="4995942" y="220509"/>
+            <a:off x="0" y="1383743"/>
             <a:ext cx="5692466" cy="1272143"/>
           </a:xfrm>
           <a:prstGeom prst="rect">
@@ -30084,8 +29988,8 @@
         </p:nvSpPr>
         <p:spPr>
           <a:xfrm>
-            <a:off x="-5945" y="2655886"/>
-            <a:ext cx="6099906" cy="3721212"/>
+            <a:off x="-196866" y="3868227"/>
+            <a:ext cx="6099906" cy="2534733"/>
           </a:xfrm>
           <a:prstGeom prst="rect">
             <a:avLst/>
@@ -30208,7 +30112,7 @@
                 <a:ea typeface="Times New Roman" panose="02020603050405020304" pitchFamily="18" charset="0"/>
                 <a:cs typeface="Times New Roman" panose="02020603050405020304" pitchFamily="18" charset="0"/>
               </a:rPr>
-              <a:t> c unic per sesiune, TTL 5s, invalidare post-consum</a:t>
+              <a:t> c unic per sesiune, invalidare post-consum</a:t>
             </a:r>
             <a:endParaRPr lang="ro-RO" sz="2800" kern="100" dirty="0">
               <a:effectLst/>
@@ -30249,126 +30153,6 @@
                 <a:cs typeface="Times New Roman" panose="02020603050405020304" pitchFamily="18" charset="0"/>
               </a:rPr>
               <a:t> JWT ancorat la contextul HTTP al sesiunii ZKP</a:t>
-            </a:r>
-            <a:endParaRPr lang="ro-RO" sz="2800" kern="100" dirty="0">
-              <a:effectLst/>
-              <a:latin typeface="Aptos" panose="020B0004020202020204" pitchFamily="34" charset="0"/>
-              <a:ea typeface="Aptos" panose="020B0004020202020204" pitchFamily="34" charset="0"/>
-              <a:cs typeface="Times New Roman" panose="02020603050405020304" pitchFamily="18" charset="0"/>
-            </a:endParaRPr>
-          </a:p>
-          <a:p>
-            <a:pPr marL="342900" lvl="0" indent="-342900">
-              <a:lnSpc>
-                <a:spcPct val="115000"/>
-              </a:lnSpc>
-              <a:spcAft>
-                <a:spcPts val="600"/>
-              </a:spcAft>
-              <a:buSzPts val="1000"/>
-              <a:buFont typeface="Symbol" panose="05050102010706020507" pitchFamily="18" charset="2"/>
-              <a:buChar char=""/>
-              <a:tabLst>
-                <a:tab pos="457200" algn="l"/>
-              </a:tabLst>
-            </a:pPr>
-            <a:r>
-              <a:rPr lang="ro-RO" sz="1800" b="1" kern="0" dirty="0">
-                <a:effectLst/>
-                <a:latin typeface="Segoe UI" panose="020B0502040204020203" pitchFamily="34" charset="0"/>
-                <a:ea typeface="Times New Roman" panose="02020603050405020304" pitchFamily="18" charset="0"/>
-                <a:cs typeface="Times New Roman" panose="02020603050405020304" pitchFamily="18" charset="0"/>
-              </a:rPr>
-              <a:t>Mutex:</a:t>
-            </a:r>
-            <a:r>
-              <a:rPr lang="ro-RO" sz="1800" kern="0" dirty="0">
-                <a:effectLst/>
-                <a:latin typeface="Segoe UI" panose="020B0502040204020203" pitchFamily="34" charset="0"/>
-                <a:ea typeface="Times New Roman" panose="02020603050405020304" pitchFamily="18" charset="0"/>
-                <a:cs typeface="Times New Roman" panose="02020603050405020304" pitchFamily="18" charset="0"/>
-              </a:rPr>
-              <a:t> max 1 sesiune activă per utilizator</a:t>
-            </a:r>
-            <a:endParaRPr lang="ro-RO" sz="2800" kern="100" dirty="0">
-              <a:effectLst/>
-              <a:latin typeface="Aptos" panose="020B0004020202020204" pitchFamily="34" charset="0"/>
-              <a:ea typeface="Aptos" panose="020B0004020202020204" pitchFamily="34" charset="0"/>
-              <a:cs typeface="Times New Roman" panose="02020603050405020304" pitchFamily="18" charset="0"/>
-            </a:endParaRPr>
-          </a:p>
-          <a:p>
-            <a:pPr marL="342900" lvl="0" indent="-342900">
-              <a:lnSpc>
-                <a:spcPct val="115000"/>
-              </a:lnSpc>
-              <a:spcAft>
-                <a:spcPts val="600"/>
-              </a:spcAft>
-              <a:buSzPts val="1000"/>
-              <a:buFont typeface="Symbol" panose="05050102010706020507" pitchFamily="18" charset="2"/>
-              <a:buChar char=""/>
-              <a:tabLst>
-                <a:tab pos="457200" algn="l"/>
-              </a:tabLst>
-            </a:pPr>
-            <a:r>
-              <a:rPr lang="ro-RO" sz="1800" b="1" kern="0" dirty="0">
-                <a:effectLst/>
-                <a:latin typeface="Segoe UI" panose="020B0502040204020203" pitchFamily="34" charset="0"/>
-                <a:ea typeface="Times New Roman" panose="02020603050405020304" pitchFamily="18" charset="0"/>
-                <a:cs typeface="Times New Roman" panose="02020603050405020304" pitchFamily="18" charset="0"/>
-              </a:rPr>
-              <a:t>JWT expirare:</a:t>
-            </a:r>
-            <a:r>
-              <a:rPr lang="ro-RO" sz="1800" kern="0" dirty="0">
-                <a:effectLst/>
-                <a:latin typeface="Segoe UI" panose="020B0502040204020203" pitchFamily="34" charset="0"/>
-                <a:ea typeface="Times New Roman" panose="02020603050405020304" pitchFamily="18" charset="0"/>
-                <a:cs typeface="Times New Roman" panose="02020603050405020304" pitchFamily="18" charset="0"/>
-              </a:rPr>
-              <a:t> 1 oră</a:t>
-            </a:r>
-            <a:endParaRPr lang="ro-RO" sz="2800" kern="100" dirty="0">
-              <a:effectLst/>
-              <a:latin typeface="Aptos" panose="020B0004020202020204" pitchFamily="34" charset="0"/>
-              <a:ea typeface="Aptos" panose="020B0004020202020204" pitchFamily="34" charset="0"/>
-              <a:cs typeface="Times New Roman" panose="02020603050405020304" pitchFamily="18" charset="0"/>
-            </a:endParaRPr>
-          </a:p>
-          <a:p>
-            <a:pPr marL="342900" lvl="0" indent="-342900">
-              <a:lnSpc>
-                <a:spcPct val="115000"/>
-              </a:lnSpc>
-              <a:spcAft>
-                <a:spcPts val="600"/>
-              </a:spcAft>
-              <a:buSzPts val="1000"/>
-              <a:buFont typeface="Symbol" panose="05050102010706020507" pitchFamily="18" charset="2"/>
-              <a:buChar char=""/>
-              <a:tabLst>
-                <a:tab pos="457200" algn="l"/>
-              </a:tabLst>
-            </a:pPr>
-            <a:r>
-              <a:rPr lang="ro-RO" sz="1800" b="1" kern="0" dirty="0">
-                <a:effectLst/>
-                <a:latin typeface="Segoe UI" panose="020B0502040204020203" pitchFamily="34" charset="0"/>
-                <a:ea typeface="Times New Roman" panose="02020603050405020304" pitchFamily="18" charset="0"/>
-                <a:cs typeface="Times New Roman" panose="02020603050405020304" pitchFamily="18" charset="0"/>
-              </a:rPr>
-              <a:t>Identitate auto-suverană:</a:t>
-            </a:r>
-            <a:r>
-              <a:rPr lang="ro-RO" sz="1800" kern="0" dirty="0">
-                <a:effectLst/>
-                <a:latin typeface="Segoe UI" panose="020B0502040204020203" pitchFamily="34" charset="0"/>
-                <a:ea typeface="Times New Roman" panose="02020603050405020304" pitchFamily="18" charset="0"/>
-                <a:cs typeface="Times New Roman" panose="02020603050405020304" pitchFamily="18" charset="0"/>
-              </a:rPr>
-              <a:t> control absolut utilizator</a:t>
             </a:r>
             <a:endParaRPr lang="ro-RO" sz="2800" kern="100" dirty="0">
               <a:effectLst/>
@@ -30393,7 +30177,7 @@
         </p:nvSpPr>
         <p:spPr>
           <a:xfrm>
-            <a:off x="5707185" y="2225911"/>
+            <a:off x="5903040" y="5025221"/>
             <a:ext cx="6099906" cy="711157"/>
           </a:xfrm>
           <a:prstGeom prst="rect">
@@ -30437,6 +30221,36 @@
           </a:p>
         </p:txBody>
       </p:sp>
+      <p:pic>
+        <p:nvPicPr>
+          <p:cNvPr id="3" name="Picture 2" descr="A screenshot of a computer&#10;&#10;AI-generated content may be incorrect.">
+            <a:extLst>
+              <a:ext uri="{FF2B5EF4-FFF2-40B4-BE49-F238E27FC236}">
+                <a16:creationId xmlns:a16="http://schemas.microsoft.com/office/drawing/2014/main" id="{E95C2625-16F1-631B-8A99-C0BC01433DED}"/>
+              </a:ext>
+            </a:extLst>
+          </p:cNvPr>
+          <p:cNvPicPr>
+            <a:picLocks noChangeAspect="1"/>
+          </p:cNvPicPr>
+          <p:nvPr/>
+        </p:nvPicPr>
+        <p:blipFill>
+          <a:blip r:embed="rId3"/>
+          <a:stretch>
+            <a:fillRect/>
+          </a:stretch>
+        </p:blipFill>
+        <p:spPr>
+          <a:xfrm>
+            <a:off x="5189421" y="193503"/>
+            <a:ext cx="8659433" cy="4734586"/>
+          </a:xfrm>
+          <a:prstGeom prst="rect">
+            <a:avLst/>
+          </a:prstGeom>
+        </p:spPr>
+      </p:pic>
     </p:spTree>
     <p:extLst>
       <p:ext uri="{BB962C8B-B14F-4D97-AF65-F5344CB8AC3E}">
@@ -35187,7 +35001,7 @@
         </p:nvSpPr>
         <p:spPr>
           <a:xfrm>
-            <a:off x="3048000" y="3001129"/>
+            <a:off x="515815" y="3768390"/>
             <a:ext cx="6096000" cy="711157"/>
           </a:xfrm>
           <a:prstGeom prst="rect">
@@ -37581,8 +37395,8 @@
         </p:nvSpPr>
         <p:spPr>
           <a:xfrm>
-            <a:off x="6435679" y="2102862"/>
-            <a:ext cx="4432948" cy="4247317"/>
+            <a:off x="6341895" y="930554"/>
+            <a:ext cx="4432948" cy="5355312"/>
           </a:xfrm>
           <a:prstGeom prst="rect">
             <a:avLst/>
@@ -37659,6 +37473,67 @@
               <a:rPr lang="ro-RO" dirty="0"/>
               <a:t>Augmented PAKE: rezistență compromitere DB</a:t>
             </a:r>
+            <a:endParaRPr lang="en-US" dirty="0"/>
+          </a:p>
+          <a:p>
+            <a:pPr lvl="0"/>
+            <a:r>
+              <a:rPr lang="en-US" dirty="0" err="1"/>
+              <a:t>Implementare</a:t>
+            </a:r>
+            <a:r>
+              <a:rPr lang="en-US" dirty="0"/>
+              <a:t> </a:t>
+            </a:r>
+            <a:r>
+              <a:rPr lang="en-US" dirty="0" err="1"/>
+              <a:t>schnorr</a:t>
+            </a:r>
+            <a:r>
+              <a:rPr lang="en-US" dirty="0"/>
+              <a:t> interactive in </a:t>
+            </a:r>
+            <a:r>
+              <a:rPr lang="en-US" dirty="0" err="1"/>
+              <a:t>faza</a:t>
+            </a:r>
+            <a:r>
+              <a:rPr lang="en-US" dirty="0"/>
+              <a:t> de </a:t>
+            </a:r>
+            <a:r>
+              <a:rPr lang="en-US" dirty="0" err="1"/>
+              <a:t>inserare</a:t>
+            </a:r>
+            <a:r>
+              <a:rPr lang="en-US" dirty="0"/>
+              <a:t> </a:t>
+            </a:r>
+            <a:r>
+              <a:rPr lang="en-US" dirty="0" err="1"/>
+              <a:t>credentiale</a:t>
+            </a:r>
+            <a:r>
+              <a:rPr lang="en-US" dirty="0"/>
+              <a:t> in </a:t>
+            </a:r>
+            <a:r>
+              <a:rPr lang="en-US" dirty="0" err="1"/>
+              <a:t>protocolul</a:t>
+            </a:r>
+            <a:r>
+              <a:rPr lang="en-US" dirty="0"/>
+              <a:t> </a:t>
+            </a:r>
+            <a:r>
+              <a:rPr lang="en-US" dirty="0" err="1"/>
+              <a:t>Oatub</a:t>
+            </a:r>
+            <a:endParaRPr lang="en-US" dirty="0"/>
+          </a:p>
+          <a:p>
+            <a:pPr lvl="0"/>
+            <a:endParaRPr lang="ro-RO" dirty="0"/>
           </a:p>
         </p:txBody>
       </p:sp>
@@ -39480,7 +39355,7 @@
         <p:spPr>
           <a:xfrm>
             <a:off x="12349" y="2327601"/>
-            <a:ext cx="6096000" cy="4039760"/>
+            <a:ext cx="6096000" cy="3721212"/>
           </a:xfrm>
           <a:prstGeom prst="rect">
             <a:avLst/>
@@ -39508,13 +39383,211 @@
               </a:tabLst>
             </a:pPr>
             <a:r>
-              <a:rPr lang="ro-RO" sz="1800" kern="0" dirty="0">
+              <a:rPr lang="en-US" sz="1800" kern="0" dirty="0">
                 <a:effectLst/>
                 <a:latin typeface="Segoe UI" panose="020B0502040204020203" pitchFamily="34" charset="0"/>
                 <a:ea typeface="Times New Roman" panose="02020603050405020304" pitchFamily="18" charset="0"/>
                 <a:cs typeface="Times New Roman" panose="02020603050405020304" pitchFamily="18" charset="0"/>
               </a:rPr>
-              <a:t>Viabilitate demonstrată: autentificare web fără transmitere parolă</a:t>
+              <a:t>Se </a:t>
+            </a:r>
+            <a:r>
+              <a:rPr lang="en-US" sz="1800" kern="0" dirty="0" err="1">
+                <a:effectLst/>
+                <a:latin typeface="Segoe UI" panose="020B0502040204020203" pitchFamily="34" charset="0"/>
+                <a:ea typeface="Times New Roman" panose="02020603050405020304" pitchFamily="18" charset="0"/>
+                <a:cs typeface="Times New Roman" panose="02020603050405020304" pitchFamily="18" charset="0"/>
+              </a:rPr>
+              <a:t>poate</a:t>
+            </a:r>
+            <a:r>
+              <a:rPr lang="en-US" sz="1800" kern="0" dirty="0">
+                <a:effectLst/>
+                <a:latin typeface="Segoe UI" panose="020B0502040204020203" pitchFamily="34" charset="0"/>
+                <a:ea typeface="Times New Roman" panose="02020603050405020304" pitchFamily="18" charset="0"/>
+                <a:cs typeface="Times New Roman" panose="02020603050405020304" pitchFamily="18" charset="0"/>
+              </a:rPr>
+              <a:t> </a:t>
+            </a:r>
+            <a:r>
+              <a:rPr lang="en-US" sz="1800" kern="0" dirty="0" err="1">
+                <a:effectLst/>
+                <a:latin typeface="Segoe UI" panose="020B0502040204020203" pitchFamily="34" charset="0"/>
+                <a:ea typeface="Times New Roman" panose="02020603050405020304" pitchFamily="18" charset="0"/>
+                <a:cs typeface="Times New Roman" panose="02020603050405020304" pitchFamily="18" charset="0"/>
+              </a:rPr>
+              <a:t>folosi</a:t>
+            </a:r>
+            <a:r>
+              <a:rPr lang="en-US" sz="1800" kern="0" dirty="0">
+                <a:effectLst/>
+                <a:latin typeface="Segoe UI" panose="020B0502040204020203" pitchFamily="34" charset="0"/>
+                <a:ea typeface="Times New Roman" panose="02020603050405020304" pitchFamily="18" charset="0"/>
+                <a:cs typeface="Times New Roman" panose="02020603050405020304" pitchFamily="18" charset="0"/>
+              </a:rPr>
+              <a:t> Schnorr </a:t>
+            </a:r>
+            <a:r>
+              <a:rPr lang="en-US" sz="1800" kern="0" dirty="0" err="1">
+                <a:effectLst/>
+                <a:latin typeface="Segoe UI" panose="020B0502040204020203" pitchFamily="34" charset="0"/>
+                <a:ea typeface="Times New Roman" panose="02020603050405020304" pitchFamily="18" charset="0"/>
+                <a:cs typeface="Times New Roman" panose="02020603050405020304" pitchFamily="18" charset="0"/>
+              </a:rPr>
+              <a:t>intr</a:t>
+            </a:r>
+            <a:r>
+              <a:rPr lang="en-US" sz="1800" kern="0" dirty="0">
+                <a:effectLst/>
+                <a:latin typeface="Segoe UI" panose="020B0502040204020203" pitchFamily="34" charset="0"/>
+                <a:ea typeface="Times New Roman" panose="02020603050405020304" pitchFamily="18" charset="0"/>
+                <a:cs typeface="Times New Roman" panose="02020603050405020304" pitchFamily="18" charset="0"/>
+              </a:rPr>
+              <a:t>-un protocol de tip Open Authorization</a:t>
+            </a:r>
+          </a:p>
+          <a:p>
+            <a:pPr marL="342900" lvl="0" indent="-342900">
+              <a:lnSpc>
+                <a:spcPct val="115000"/>
+              </a:lnSpc>
+              <a:spcAft>
+                <a:spcPts val="600"/>
+              </a:spcAft>
+              <a:buSzPts val="1000"/>
+              <a:buFont typeface="Symbol" panose="05050102010706020507" pitchFamily="18" charset="2"/>
+              <a:buChar char=""/>
+              <a:tabLst>
+                <a:tab pos="457200" algn="l"/>
+              </a:tabLst>
+            </a:pPr>
+            <a:r>
+              <a:rPr lang="en-US" kern="0" dirty="0">
+                <a:latin typeface="Segoe UI" panose="020B0502040204020203" pitchFamily="34" charset="0"/>
+                <a:ea typeface="Aptos" panose="020B0004020202020204" pitchFamily="34" charset="0"/>
+                <a:cs typeface="Times New Roman" panose="02020603050405020304" pitchFamily="18" charset="0"/>
+              </a:rPr>
+              <a:t>O </a:t>
+            </a:r>
+            <a:r>
+              <a:rPr lang="en-US" kern="0" dirty="0" err="1">
+                <a:latin typeface="Segoe UI" panose="020B0502040204020203" pitchFamily="34" charset="0"/>
+                <a:ea typeface="Aptos" panose="020B0004020202020204" pitchFamily="34" charset="0"/>
+                <a:cs typeface="Times New Roman" panose="02020603050405020304" pitchFamily="18" charset="0"/>
+              </a:rPr>
+              <a:t>implementare</a:t>
+            </a:r>
+            <a:r>
+              <a:rPr lang="en-US" kern="0" dirty="0">
+                <a:latin typeface="Segoe UI" panose="020B0502040204020203" pitchFamily="34" charset="0"/>
+                <a:ea typeface="Aptos" panose="020B0004020202020204" pitchFamily="34" charset="0"/>
+                <a:cs typeface="Times New Roman" panose="02020603050405020304" pitchFamily="18" charset="0"/>
+              </a:rPr>
+              <a:t> ZKP de </a:t>
+            </a:r>
+            <a:r>
+              <a:rPr lang="en-US" kern="0" dirty="0" err="1">
+                <a:latin typeface="Segoe UI" panose="020B0502040204020203" pitchFamily="34" charset="0"/>
+                <a:ea typeface="Aptos" panose="020B0004020202020204" pitchFamily="34" charset="0"/>
+                <a:cs typeface="Times New Roman" panose="02020603050405020304" pitchFamily="18" charset="0"/>
+              </a:rPr>
+              <a:t>acest</a:t>
+            </a:r>
+            <a:r>
+              <a:rPr lang="en-US" kern="0" dirty="0">
+                <a:latin typeface="Segoe UI" panose="020B0502040204020203" pitchFamily="34" charset="0"/>
+                <a:ea typeface="Aptos" panose="020B0004020202020204" pitchFamily="34" charset="0"/>
+                <a:cs typeface="Times New Roman" panose="02020603050405020304" pitchFamily="18" charset="0"/>
+              </a:rPr>
+              <a:t> tip </a:t>
+            </a:r>
+            <a:r>
+              <a:rPr lang="en-US" kern="0" dirty="0" err="1">
+                <a:latin typeface="Segoe UI" panose="020B0502040204020203" pitchFamily="34" charset="0"/>
+                <a:ea typeface="Aptos" panose="020B0004020202020204" pitchFamily="34" charset="0"/>
+                <a:cs typeface="Times New Roman" panose="02020603050405020304" pitchFamily="18" charset="0"/>
+              </a:rPr>
+              <a:t>anuleaza</a:t>
+            </a:r>
+            <a:r>
+              <a:rPr lang="en-US" kern="0" dirty="0">
+                <a:latin typeface="Segoe UI" panose="020B0502040204020203" pitchFamily="34" charset="0"/>
+                <a:ea typeface="Aptos" panose="020B0004020202020204" pitchFamily="34" charset="0"/>
+                <a:cs typeface="Times New Roman" panose="02020603050405020304" pitchFamily="18" charset="0"/>
+              </a:rPr>
+              <a:t> o </a:t>
+            </a:r>
+            <a:r>
+              <a:rPr lang="en-US" kern="0" dirty="0" err="1">
+                <a:latin typeface="Segoe UI" panose="020B0502040204020203" pitchFamily="34" charset="0"/>
+                <a:ea typeface="Aptos" panose="020B0004020202020204" pitchFamily="34" charset="0"/>
+                <a:cs typeface="Times New Roman" panose="02020603050405020304" pitchFamily="18" charset="0"/>
+              </a:rPr>
+              <a:t>bresa</a:t>
+            </a:r>
+            <a:r>
+              <a:rPr lang="en-US" kern="0" dirty="0">
+                <a:latin typeface="Segoe UI" panose="020B0502040204020203" pitchFamily="34" charset="0"/>
+                <a:ea typeface="Aptos" panose="020B0004020202020204" pitchFamily="34" charset="0"/>
+                <a:cs typeface="Times New Roman" panose="02020603050405020304" pitchFamily="18" charset="0"/>
+              </a:rPr>
+              <a:t> a </a:t>
+            </a:r>
+            <a:r>
+              <a:rPr lang="en-US" kern="0" dirty="0" err="1">
+                <a:latin typeface="Segoe UI" panose="020B0502040204020203" pitchFamily="34" charset="0"/>
+                <a:ea typeface="Aptos" panose="020B0004020202020204" pitchFamily="34" charset="0"/>
+                <a:cs typeface="Times New Roman" panose="02020603050405020304" pitchFamily="18" charset="0"/>
+              </a:rPr>
+              <a:t>bazei</a:t>
+            </a:r>
+            <a:r>
+              <a:rPr lang="en-US" kern="0" dirty="0">
+                <a:latin typeface="Segoe UI" panose="020B0502040204020203" pitchFamily="34" charset="0"/>
+                <a:ea typeface="Aptos" panose="020B0004020202020204" pitchFamily="34" charset="0"/>
+                <a:cs typeface="Times New Roman" panose="02020603050405020304" pitchFamily="18" charset="0"/>
+              </a:rPr>
+              <a:t> de date, </a:t>
+            </a:r>
+            <a:r>
+              <a:rPr lang="en-US" kern="0" dirty="0" err="1">
+                <a:latin typeface="Segoe UI" panose="020B0502040204020203" pitchFamily="34" charset="0"/>
+                <a:ea typeface="Aptos" panose="020B0004020202020204" pitchFamily="34" charset="0"/>
+                <a:cs typeface="Times New Roman" panose="02020603050405020304" pitchFamily="18" charset="0"/>
+              </a:rPr>
+              <a:t>sau</a:t>
+            </a:r>
+            <a:r>
+              <a:rPr lang="en-US" kern="0" dirty="0">
+                <a:latin typeface="Segoe UI" panose="020B0502040204020203" pitchFamily="34" charset="0"/>
+                <a:ea typeface="Aptos" panose="020B0004020202020204" pitchFamily="34" charset="0"/>
+                <a:cs typeface="Times New Roman" panose="02020603050405020304" pitchFamily="18" charset="0"/>
+              </a:rPr>
+              <a:t> o </a:t>
+            </a:r>
+            <a:r>
+              <a:rPr lang="en-US" kern="0" dirty="0" err="1">
+                <a:latin typeface="Segoe UI" panose="020B0502040204020203" pitchFamily="34" charset="0"/>
+                <a:ea typeface="Aptos" panose="020B0004020202020204" pitchFamily="34" charset="0"/>
+                <a:cs typeface="Times New Roman" panose="02020603050405020304" pitchFamily="18" charset="0"/>
+              </a:rPr>
+              <a:t>exfiltrare</a:t>
+            </a:r>
+            <a:r>
+              <a:rPr lang="en-US" kern="0" dirty="0">
+                <a:latin typeface="Segoe UI" panose="020B0502040204020203" pitchFamily="34" charset="0"/>
+                <a:ea typeface="Aptos" panose="020B0004020202020204" pitchFamily="34" charset="0"/>
+                <a:cs typeface="Times New Roman" panose="02020603050405020304" pitchFamily="18" charset="0"/>
+              </a:rPr>
+              <a:t> a </a:t>
+            </a:r>
+            <a:r>
+              <a:rPr lang="en-US" kern="0" dirty="0" err="1">
+                <a:latin typeface="Segoe UI" panose="020B0502040204020203" pitchFamily="34" charset="0"/>
+                <a:ea typeface="Aptos" panose="020B0004020202020204" pitchFamily="34" charset="0"/>
+                <a:cs typeface="Times New Roman" panose="02020603050405020304" pitchFamily="18" charset="0"/>
+              </a:rPr>
+              <a:t>datelor</a:t>
             </a:r>
             <a:endParaRPr lang="ro-RO" sz="2800" kern="100" dirty="0">
               <a:effectLst/>
@@ -39539,13 +39612,13 @@
               </a:tabLst>
             </a:pPr>
             <a:r>
-              <a:rPr lang="ro-RO" sz="1800" b="1" kern="0" dirty="0">
+              <a:rPr lang="ro-RO" sz="1800" kern="0" dirty="0">
                 <a:effectLst/>
                 <a:latin typeface="Segoe UI" panose="020B0502040204020203" pitchFamily="34" charset="0"/>
                 <a:ea typeface="Times New Roman" panose="02020603050405020304" pitchFamily="18" charset="0"/>
                 <a:cs typeface="Times New Roman" panose="02020603050405020304" pitchFamily="18" charset="0"/>
               </a:rPr>
-              <a:t>49 teste, 100% succes</a:t>
+              <a:t>Audit trafic: exclusiv valori matematice efemere în rețea</a:t>
             </a:r>
             <a:endParaRPr lang="ro-RO" sz="2800" kern="100" dirty="0">
               <a:effectLst/>
@@ -39576,7 +39649,7 @@
                 <a:ea typeface="Times New Roman" panose="02020603050405020304" pitchFamily="18" charset="0"/>
                 <a:cs typeface="Times New Roman" panose="02020603050405020304" pitchFamily="18" charset="0"/>
               </a:rPr>
-              <a:t>Audit trafic: exclusiv valori matematice efemere în rețea</a:t>
+              <a:t>Performanță intermediară față de PAKE consacrate</a:t>
             </a:r>
             <a:endParaRPr lang="ro-RO" sz="2800" kern="100" dirty="0">
               <a:effectLst/>
@@ -39601,13 +39674,58 @@
               </a:tabLst>
             </a:pPr>
             <a:r>
+              <a:rPr lang="en-US" sz="1800" kern="0" dirty="0">
+                <a:effectLst/>
+                <a:latin typeface="Segoe UI" panose="020B0502040204020203" pitchFamily="34" charset="0"/>
+                <a:ea typeface="Times New Roman" panose="02020603050405020304" pitchFamily="18" charset="0"/>
+                <a:cs typeface="Times New Roman" panose="02020603050405020304" pitchFamily="18" charset="0"/>
+              </a:rPr>
+              <a:t>Potential de </a:t>
+            </a:r>
+            <a:r>
+              <a:rPr lang="en-US" sz="1800" kern="0" dirty="0" err="1">
+                <a:effectLst/>
+                <a:latin typeface="Segoe UI" panose="020B0502040204020203" pitchFamily="34" charset="0"/>
+                <a:ea typeface="Times New Roman" panose="02020603050405020304" pitchFamily="18" charset="0"/>
+                <a:cs typeface="Times New Roman" panose="02020603050405020304" pitchFamily="18" charset="0"/>
+              </a:rPr>
+              <a:t>optimizare</a:t>
+            </a:r>
+            <a:r>
+              <a:rPr lang="en-US" sz="1800" kern="0" dirty="0">
+                <a:effectLst/>
+                <a:latin typeface="Segoe UI" panose="020B0502040204020203" pitchFamily="34" charset="0"/>
+                <a:ea typeface="Times New Roman" panose="02020603050405020304" pitchFamily="18" charset="0"/>
+                <a:cs typeface="Times New Roman" panose="02020603050405020304" pitchFamily="18" charset="0"/>
+              </a:rPr>
+              <a:t> </a:t>
+            </a:r>
+            <a:r>
               <a:rPr lang="ro-RO" sz="1800" kern="0" dirty="0">
                 <a:effectLst/>
                 <a:latin typeface="Segoe UI" panose="020B0502040204020203" pitchFamily="34" charset="0"/>
                 <a:ea typeface="Times New Roman" panose="02020603050405020304" pitchFamily="18" charset="0"/>
                 <a:cs typeface="Times New Roman" panose="02020603050405020304" pitchFamily="18" charset="0"/>
               </a:rPr>
-              <a:t>Performanță intermediară față de PAKE consacrate</a:t>
+              <a:t>Schnorr-EC-C-Lib: </a:t>
+            </a:r>
+            <a:r>
+              <a:rPr lang="ro-RO" sz="1800" b="1" kern="0" dirty="0">
+                <a:effectLst/>
+                <a:latin typeface="Segoe UI" panose="020B0502040204020203" pitchFamily="34" charset="0"/>
+                <a:ea typeface="Times New Roman" panose="02020603050405020304" pitchFamily="18" charset="0"/>
+                <a:cs typeface="Times New Roman" panose="02020603050405020304" pitchFamily="18" charset="0"/>
+              </a:rPr>
+              <a:t>9,51 ms</a:t>
+            </a:r>
+            <a:r>
+              <a:rPr lang="ro-RO" sz="1800" kern="0" dirty="0">
+                <a:effectLst/>
+                <a:latin typeface="Segoe UI" panose="020B0502040204020203" pitchFamily="34" charset="0"/>
+                <a:ea typeface="Times New Roman" panose="02020603050405020304" pitchFamily="18" charset="0"/>
+                <a:cs typeface="Times New Roman" panose="02020603050405020304" pitchFamily="18" charset="0"/>
+              </a:rPr>
+              <a:t> </a:t>
             </a:r>
             <a:endParaRPr lang="ro-RO" sz="2800" kern="100" dirty="0">
               <a:effectLst/>
@@ -39638,56 +39756,52 @@
                 <a:ea typeface="Times New Roman" panose="02020603050405020304" pitchFamily="18" charset="0"/>
                 <a:cs typeface="Times New Roman" panose="02020603050405020304" pitchFamily="18" charset="0"/>
               </a:rPr>
-              <a:t>Schnorr-EC-C-Lib: </a:t>
-            </a:r>
-            <a:r>
-              <a:rPr lang="ro-RO" sz="1800" b="1" kern="0" dirty="0">
+              <a:t>Limitări:</a:t>
+            </a:r>
+            <a:r>
+              <a:rPr lang="en-US" sz="1800" kern="0" dirty="0">
                 <a:effectLst/>
                 <a:latin typeface="Segoe UI" panose="020B0502040204020203" pitchFamily="34" charset="0"/>
                 <a:ea typeface="Times New Roman" panose="02020603050405020304" pitchFamily="18" charset="0"/>
                 <a:cs typeface="Times New Roman" panose="02020603050405020304" pitchFamily="18" charset="0"/>
               </a:rPr>
-              <a:t>9,51 ms</a:t>
-            </a:r>
-            <a:r>
-              <a:rPr lang="ro-RO" sz="1800" kern="0" dirty="0">
+              <a:t> </a:t>
+            </a:r>
+            <a:r>
+              <a:rPr lang="en-US" sz="1800" kern="0" dirty="0" err="1">
                 <a:effectLst/>
                 <a:latin typeface="Segoe UI" panose="020B0502040204020203" pitchFamily="34" charset="0"/>
                 <a:ea typeface="Times New Roman" panose="02020603050405020304" pitchFamily="18" charset="0"/>
                 <a:cs typeface="Times New Roman" panose="02020603050405020304" pitchFamily="18" charset="0"/>
               </a:rPr>
-              <a:t> (potențial optimizare confirmat)</a:t>
-            </a:r>
-            <a:endParaRPr lang="ro-RO" sz="2800" kern="100" dirty="0">
-              <a:effectLst/>
-              <a:latin typeface="Aptos" panose="020B0004020202020204" pitchFamily="34" charset="0"/>
-              <a:ea typeface="Aptos" panose="020B0004020202020204" pitchFamily="34" charset="0"/>
-              <a:cs typeface="Times New Roman" panose="02020603050405020304" pitchFamily="18" charset="0"/>
-            </a:endParaRPr>
-          </a:p>
-          <a:p>
-            <a:pPr marL="342900" lvl="0" indent="-342900">
-              <a:lnSpc>
-                <a:spcPct val="115000"/>
-              </a:lnSpc>
-              <a:spcAft>
-                <a:spcPts val="600"/>
-              </a:spcAft>
-              <a:buSzPts val="1000"/>
-              <a:buFont typeface="Symbol" panose="05050102010706020507" pitchFamily="18" charset="2"/>
-              <a:buChar char=""/>
-              <a:tabLst>
-                <a:tab pos="457200" algn="l"/>
-              </a:tabLst>
-            </a:pPr>
-            <a:r>
-              <a:rPr lang="ro-RO" sz="1800" kern="0" dirty="0">
+              <a:t>viteza</a:t>
+            </a:r>
+            <a:r>
+              <a:rPr lang="en-US" sz="1800" kern="0" dirty="0">
                 <a:effectLst/>
                 <a:latin typeface="Segoe UI" panose="020B0502040204020203" pitchFamily="34" charset="0"/>
                 <a:ea typeface="Times New Roman" panose="02020603050405020304" pitchFamily="18" charset="0"/>
                 <a:cs typeface="Times New Roman" panose="02020603050405020304" pitchFamily="18" charset="0"/>
               </a:rPr>
-              <a:t>Limitări: G=4, SHAKE256 browser, absență rezistență breșă DB</a:t>
+              <a:t>, </a:t>
+            </a:r>
+            <a:r>
+              <a:rPr lang="en-US" sz="1800" kern="0" dirty="0" err="1">
+                <a:effectLst/>
+                <a:latin typeface="Segoe UI" panose="020B0502040204020203" pitchFamily="34" charset="0"/>
+                <a:ea typeface="Times New Roman" panose="02020603050405020304" pitchFamily="18" charset="0"/>
+                <a:cs typeface="Times New Roman" panose="02020603050405020304" pitchFamily="18" charset="0"/>
+              </a:rPr>
+              <a:t>verificare</a:t>
+            </a:r>
+            <a:r>
+              <a:rPr lang="en-US" sz="1800" kern="0" dirty="0">
+                <a:effectLst/>
+                <a:latin typeface="Segoe UI" panose="020B0502040204020203" pitchFamily="34" charset="0"/>
+                <a:ea typeface="Times New Roman" panose="02020603050405020304" pitchFamily="18" charset="0"/>
+                <a:cs typeface="Times New Roman" panose="02020603050405020304" pitchFamily="18" charset="0"/>
+              </a:rPr>
+              <a:t> browser</a:t>
             </a:r>
             <a:endParaRPr lang="ro-RO" sz="2800" kern="100" dirty="0">
               <a:effectLst/>
@@ -40671,7 +40785,7 @@
         </p:nvSpPr>
         <p:spPr>
           <a:xfrm>
-            <a:off x="3935157" y="337922"/>
+            <a:off x="762111" y="361087"/>
             <a:ext cx="7376674" cy="1169551"/>
           </a:xfrm>
           <a:prstGeom prst="rect">
@@ -41189,7 +41303,7 @@
         <p:spPr>
           <a:xfrm>
             <a:off x="4225780" y="1801538"/>
-            <a:ext cx="7376674" cy="2862322"/>
+            <a:ext cx="7376674" cy="3970318"/>
           </a:xfrm>
           <a:prstGeom prst="rect">
             <a:avLst/>
@@ -41206,53 +41320,179 @@
           <a:lstStyle/>
           <a:p>
             <a:pPr lvl="0"/>
+            <a:endParaRPr lang="ro-RO" dirty="0">
+              <a:latin typeface="Segoe UI" panose="020B0502040204020203" pitchFamily="34" charset="0"/>
+              <a:cs typeface="Segoe UI" panose="020B0502040204020203" pitchFamily="34" charset="0"/>
+            </a:endParaRPr>
+          </a:p>
+          <a:p>
+            <a:pPr lvl="0"/>
             <a:r>
               <a:rPr lang="ro-RO" dirty="0">
                 <a:latin typeface="Segoe UI" panose="020B0502040204020203" pitchFamily="34" charset="0"/>
                 <a:cs typeface="Segoe UI" panose="020B0502040204020203" pitchFamily="34" charset="0"/>
               </a:rPr>
-              <a:t>Autentificarea web clasică: secret partajat transmis către server</a:t>
+              <a:t>Autentificarea </a:t>
+            </a:r>
+            <a:r>
+              <a:rPr lang="en-US" dirty="0" err="1">
+                <a:latin typeface="Segoe UI" panose="020B0502040204020203" pitchFamily="34" charset="0"/>
+                <a:cs typeface="Segoe UI" panose="020B0502040204020203" pitchFamily="34" charset="0"/>
+              </a:rPr>
+              <a:t>Oauth</a:t>
+            </a:r>
+            <a:r>
+              <a:rPr lang="en-US" dirty="0">
+                <a:latin typeface="Segoe UI" panose="020B0502040204020203" pitchFamily="34" charset="0"/>
+                <a:cs typeface="Segoe UI" panose="020B0502040204020203" pitchFamily="34" charset="0"/>
+              </a:rPr>
+              <a:t> </a:t>
+            </a:r>
+            <a:r>
+              <a:rPr lang="en-US" dirty="0" err="1">
+                <a:latin typeface="Segoe UI" panose="020B0502040204020203" pitchFamily="34" charset="0"/>
+                <a:cs typeface="Segoe UI" panose="020B0502040204020203" pitchFamily="34" charset="0"/>
+              </a:rPr>
+              <a:t>clasica</a:t>
+            </a:r>
+            <a:r>
+              <a:rPr lang="ro-RO" dirty="0">
+                <a:latin typeface="Segoe UI" panose="020B0502040204020203" pitchFamily="34" charset="0"/>
+                <a:cs typeface="Segoe UI" panose="020B0502040204020203" pitchFamily="34" charset="0"/>
+              </a:rPr>
+              <a:t>: secret partajat transmis către server</a:t>
             </a:r>
           </a:p>
           <a:p>
             <a:pPr lvl="0"/>
+            <a:endParaRPr lang="en-US" dirty="0">
+              <a:latin typeface="Segoe UI" panose="020B0502040204020203" pitchFamily="34" charset="0"/>
+              <a:cs typeface="Segoe UI" panose="020B0502040204020203" pitchFamily="34" charset="0"/>
+            </a:endParaRPr>
+          </a:p>
+          <a:p>
+            <a:pPr lvl="0"/>
             <a:r>
               <a:rPr lang="ro-RO" dirty="0">
                 <a:latin typeface="Segoe UI" panose="020B0502040204020203" pitchFamily="34" charset="0"/>
                 <a:cs typeface="Segoe UI" panose="020B0502040204020203" pitchFamily="34" charset="0"/>
               </a:rPr>
-              <a:t>HTTPS: reduce interceptarea, nu elimină vulnerabilitățile structurale (breșe DB, reutilizare parole, replay)</a:t>
-            </a:r>
+              <a:t>HTTPS: reduce interceptarea, nu elimină vulnerabilitățile structurale (breșe DB, reutilizare parole, </a:t>
+            </a:r>
+            <a:r>
+              <a:rPr lang="en-US" dirty="0">
+                <a:latin typeface="Segoe UI" panose="020B0502040204020203" pitchFamily="34" charset="0"/>
+                <a:cs typeface="Segoe UI" panose="020B0502040204020203" pitchFamily="34" charset="0"/>
+              </a:rPr>
+              <a:t>SNDL</a:t>
+            </a:r>
+            <a:r>
+              <a:rPr lang="ro-RO" dirty="0">
+                <a:latin typeface="Segoe UI" panose="020B0502040204020203" pitchFamily="34" charset="0"/>
+                <a:cs typeface="Segoe UI" panose="020B0502040204020203" pitchFamily="34" charset="0"/>
+              </a:rPr>
+              <a:t>)</a:t>
+            </a:r>
+            <a:endParaRPr lang="en-US" dirty="0">
+              <a:latin typeface="Segoe UI" panose="020B0502040204020203" pitchFamily="34" charset="0"/>
+              <a:cs typeface="Segoe UI" panose="020B0502040204020203" pitchFamily="34" charset="0"/>
+            </a:endParaRPr>
           </a:p>
           <a:p>
             <a:pPr lvl="0"/>
+            <a:endParaRPr lang="ro-RO" dirty="0">
+              <a:latin typeface="Segoe UI" panose="020B0502040204020203" pitchFamily="34" charset="0"/>
+              <a:cs typeface="Segoe UI" panose="020B0502040204020203" pitchFamily="34" charset="0"/>
+            </a:endParaRPr>
+          </a:p>
+          <a:p>
+            <a:r>
+              <a:rPr lang="ro-RO" b="1" dirty="0">
+                <a:latin typeface="Segoe UI" panose="020B0502040204020203" pitchFamily="34" charset="0"/>
+                <a:cs typeface="Segoe UI" panose="020B0502040204020203" pitchFamily="34" charset="0"/>
+              </a:rPr>
+              <a:t>S</a:t>
+            </a:r>
+            <a:r>
+              <a:rPr lang="en-US" b="1" dirty="0" err="1">
+                <a:latin typeface="Segoe UI" panose="020B0502040204020203" pitchFamily="34" charset="0"/>
+                <a:cs typeface="Segoe UI" panose="020B0502040204020203" pitchFamily="34" charset="0"/>
+              </a:rPr>
+              <a:t>olutie</a:t>
+            </a:r>
+            <a:r>
+              <a:rPr lang="ro-RO" b="1" dirty="0">
+                <a:latin typeface="Segoe UI" panose="020B0502040204020203" pitchFamily="34" charset="0"/>
+                <a:cs typeface="Segoe UI" panose="020B0502040204020203" pitchFamily="34" charset="0"/>
+              </a:rPr>
+              <a:t>:</a:t>
+            </a:r>
             <a:r>
               <a:rPr lang="ro-RO" dirty="0">
                 <a:latin typeface="Segoe UI" panose="020B0502040204020203" pitchFamily="34" charset="0"/>
                 <a:cs typeface="Segoe UI" panose="020B0502040204020203" pitchFamily="34" charset="0"/>
               </a:rPr>
-              <a:t>OAuth 2.0: credențiale expuse în faza de autentificare</a:t>
-            </a:r>
+              <a:t> </a:t>
+            </a:r>
+            <a:r>
+              <a:rPr lang="en-US" dirty="0">
+                <a:latin typeface="Segoe UI" panose="020B0502040204020203" pitchFamily="34" charset="0"/>
+                <a:cs typeface="Segoe UI" panose="020B0502040204020203" pitchFamily="34" charset="0"/>
+              </a:rPr>
+              <a:t>Protocol de </a:t>
+            </a:r>
+            <a:r>
+              <a:rPr lang="en-US" dirty="0" err="1">
+                <a:latin typeface="Segoe UI" panose="020B0502040204020203" pitchFamily="34" charset="0"/>
+                <a:cs typeface="Segoe UI" panose="020B0502040204020203" pitchFamily="34" charset="0"/>
+              </a:rPr>
+              <a:t>autentificare</a:t>
+            </a:r>
+            <a:r>
+              <a:rPr lang="en-US" dirty="0">
+                <a:latin typeface="Segoe UI" panose="020B0502040204020203" pitchFamily="34" charset="0"/>
+                <a:cs typeface="Segoe UI" panose="020B0502040204020203" pitchFamily="34" charset="0"/>
+              </a:rPr>
+              <a:t> f</a:t>
+            </a:r>
+            <a:r>
+              <a:rPr lang="ro-RO" dirty="0">
+                <a:latin typeface="Segoe UI" panose="020B0502040204020203" pitchFamily="34" charset="0"/>
+                <a:cs typeface="Segoe UI" panose="020B0502040204020203" pitchFamily="34" charset="0"/>
+              </a:rPr>
+              <a:t>ără transmiterea parolei către server.</a:t>
+            </a:r>
+            <a:endParaRPr lang="en-US" dirty="0">
+              <a:latin typeface="Segoe UI" panose="020B0502040204020203" pitchFamily="34" charset="0"/>
+              <a:cs typeface="Segoe UI" panose="020B0502040204020203" pitchFamily="34" charset="0"/>
+            </a:endParaRPr>
           </a:p>
           <a:p>
             <a:pPr lvl="0"/>
             <a:r>
-              <a:rPr lang="ro-RO" b="1" dirty="0">
-                <a:latin typeface="Segoe UI" panose="020B0502040204020203" pitchFamily="34" charset="0"/>
-                <a:cs typeface="Segoe UI" panose="020B0502040204020203" pitchFamily="34" charset="0"/>
-              </a:rPr>
-              <a:t>Scop:</a:t>
-            </a:r>
-            <a:r>
               <a:rPr lang="ro-RO" dirty="0">
                 <a:latin typeface="Segoe UI" panose="020B0502040204020203" pitchFamily="34" charset="0"/>
                 <a:cs typeface="Segoe UI" panose="020B0502040204020203" pitchFamily="34" charset="0"/>
               </a:rPr>
-              <a:t> protocol hibrid Schnorr ZKP + OAuth 2.0, parola nu părăsește dispozitivul</a:t>
+              <a:t>, </a:t>
+            </a:r>
+            <a:r>
+              <a:rPr lang="en-US" dirty="0">
+                <a:latin typeface="Segoe UI" panose="020B0502040204020203" pitchFamily="34" charset="0"/>
+                <a:cs typeface="Segoe UI" panose="020B0502040204020203" pitchFamily="34" charset="0"/>
+              </a:rPr>
+              <a:t>Schnorr</a:t>
             </a:r>
           </a:p>
           <a:p>
             <a:pPr lvl="0"/>
+            <a:endParaRPr lang="en-US" dirty="0">
+              <a:latin typeface="Segoe UI" panose="020B0502040204020203" pitchFamily="34" charset="0"/>
+              <a:cs typeface="Segoe UI" panose="020B0502040204020203" pitchFamily="34" charset="0"/>
+            </a:endParaRPr>
+          </a:p>
+          <a:p>
+            <a:pPr lvl="0"/>
             <a:r>
               <a:rPr lang="ro-RO" dirty="0">
                 <a:latin typeface="Segoe UI" panose="020B0502040204020203" pitchFamily="34" charset="0"/>
@@ -41263,13 +41503,52 @@
           </a:p>
           <a:p>
             <a:pPr lvl="0"/>
+            <a:endParaRPr lang="en-US" dirty="0">
+              <a:latin typeface="Segoe UI" panose="020B0502040204020203" pitchFamily="34" charset="0"/>
+              <a:cs typeface="Segoe UI" panose="020B0502040204020203" pitchFamily="34" charset="0"/>
+            </a:endParaRPr>
+          </a:p>
+          <a:p>
+            <a:pPr lvl="0"/>
             <a:r>
               <a:rPr lang="ro-RO" dirty="0">
                 <a:latin typeface="Segoe UI" panose="020B0502040204020203" pitchFamily="34" charset="0"/>
                 <a:cs typeface="Segoe UI" panose="020B0502040204020203" pitchFamily="34" charset="0"/>
               </a:rPr>
-              <a:t>Referință: 3 fluxuri OAuth clasice + evaluare comparativă SRP-6a, zk-SNARK</a:t>
-            </a:r>
+              <a:t>Referință: 3 fluxuri OAuth clasice + evaluare comparativă </a:t>
+            </a:r>
+            <a:r>
+              <a:rPr lang="en-US" dirty="0" err="1">
+                <a:latin typeface="Segoe UI" panose="020B0502040204020203" pitchFamily="34" charset="0"/>
+                <a:cs typeface="Segoe UI" panose="020B0502040204020203" pitchFamily="34" charset="0"/>
+              </a:rPr>
+              <a:t>protocoale</a:t>
+            </a:r>
+            <a:r>
+              <a:rPr lang="en-US" dirty="0">
+                <a:latin typeface="Segoe UI" panose="020B0502040204020203" pitchFamily="34" charset="0"/>
+                <a:cs typeface="Segoe UI" panose="020B0502040204020203" pitchFamily="34" charset="0"/>
+              </a:rPr>
+              <a:t> ZKP (</a:t>
+            </a:r>
+            <a:r>
+              <a:rPr lang="ro-RO" dirty="0">
+                <a:latin typeface="Segoe UI" panose="020B0502040204020203" pitchFamily="34" charset="0"/>
+                <a:cs typeface="Segoe UI" panose="020B0502040204020203" pitchFamily="34" charset="0"/>
+              </a:rPr>
+              <a:t>SRP-6a, zk-SNARK</a:t>
+            </a:r>
+            <a:r>
+              <a:rPr lang="en-US" dirty="0">
+                <a:latin typeface="Segoe UI" panose="020B0502040204020203" pitchFamily="34" charset="0"/>
+                <a:cs typeface="Segoe UI" panose="020B0502040204020203" pitchFamily="34" charset="0"/>
+              </a:rPr>
+              <a:t>)</a:t>
+            </a:r>
+            <a:endParaRPr lang="ro-RO" dirty="0">
+              <a:latin typeface="Segoe UI" panose="020B0502040204020203" pitchFamily="34" charset="0"/>
+              <a:cs typeface="Segoe UI" panose="020B0502040204020203" pitchFamily="34" charset="0"/>
+            </a:endParaRPr>
           </a:p>
         </p:txBody>
       </p:sp>
@@ -43728,10 +44007,10 @@
       </p:pic>
       <p:pic>
         <p:nvPicPr>
-          <p:cNvPr id="35" name="Picture 34">
+          <p:cNvPr id="6" name="Picture 5">
             <a:extLst>
               <a:ext uri="{FF2B5EF4-FFF2-40B4-BE49-F238E27FC236}">
-                <a16:creationId xmlns:a16="http://schemas.microsoft.com/office/drawing/2014/main" id="{8BF66AB4-86BD-FF4F-B228-4BB0663E5EC5}"/>
+                <a16:creationId xmlns:a16="http://schemas.microsoft.com/office/drawing/2014/main" id="{FC79A313-4809-C65C-0797-CE09770F07CC}"/>
               </a:ext>
             </a:extLst>
           </p:cNvPr>
@@ -43748,261 +44027,14 @@
         </p:blipFill>
         <p:spPr>
           <a:xfrm>
-            <a:off x="8194046" y="2808838"/>
-            <a:ext cx="863099" cy="832921"/>
+            <a:off x="9539662" y="4452323"/>
+            <a:ext cx="477592" cy="562441"/>
           </a:xfrm>
           <a:prstGeom prst="rect">
             <a:avLst/>
           </a:prstGeom>
         </p:spPr>
       </p:pic>
-      <p:pic>
-        <p:nvPicPr>
-          <p:cNvPr id="36" name="Picture 35">
-            <a:extLst>
-              <a:ext uri="{FF2B5EF4-FFF2-40B4-BE49-F238E27FC236}">
-                <a16:creationId xmlns:a16="http://schemas.microsoft.com/office/drawing/2014/main" id="{9B7153B3-28B8-EB4E-83B9-95654EE169ED}"/>
-              </a:ext>
-            </a:extLst>
-          </p:cNvPr>
-          <p:cNvPicPr>
-            <a:picLocks noChangeAspect="1"/>
-          </p:cNvPicPr>
-          <p:nvPr/>
-        </p:nvPicPr>
-        <p:blipFill>
-          <a:blip r:embed="rId10"/>
-          <a:stretch>
-            <a:fillRect/>
-          </a:stretch>
-        </p:blipFill>
-        <p:spPr>
-          <a:xfrm>
-            <a:off x="7349255" y="5258627"/>
-            <a:ext cx="826117" cy="839749"/>
-          </a:xfrm>
-          <a:prstGeom prst="rect">
-            <a:avLst/>
-          </a:prstGeom>
-        </p:spPr>
-      </p:pic>
-      <p:sp>
-        <p:nvSpPr>
-          <p:cNvPr id="3" name="TextBox 2">
-            <a:extLst>
-              <a:ext uri="{FF2B5EF4-FFF2-40B4-BE49-F238E27FC236}">
-                <a16:creationId xmlns:a16="http://schemas.microsoft.com/office/drawing/2014/main" id="{2FE63A38-2CDF-1910-89B2-340C8A5E52A4}"/>
-              </a:ext>
-            </a:extLst>
-          </p:cNvPr>
-          <p:cNvSpPr txBox="1"/>
-          <p:nvPr/>
-        </p:nvSpPr>
-        <p:spPr>
-          <a:xfrm>
-            <a:off x="7971063" y="1865694"/>
-            <a:ext cx="762958" cy="369332"/>
-          </a:xfrm>
-          <a:prstGeom prst="rect">
-            <a:avLst/>
-          </a:prstGeom>
-          <a:noFill/>
-        </p:spPr>
-        <p:txBody>
-          <a:bodyPr rot="0" spcFirstLastPara="0" vertOverflow="overflow" horzOverflow="overflow" vert="horz" wrap="square" lIns="91440" tIns="45720" rIns="91440" bIns="45720" numCol="1" spcCol="0" rtlCol="0" fromWordArt="0" anchor="t" anchorCtr="0" forceAA="0" compatLnSpc="1">
-            <a:prstTxWarp prst="textNoShape">
-              <a:avLst/>
-            </a:prstTxWarp>
-            <a:spAutoFit/>
-          </a:bodyPr>
-          <a:lstStyle/>
-          <a:p>
-            <a:pPr algn="l"/>
-            <a:r>
-              <a:rPr lang="en-US" dirty="0">
-                <a:latin typeface="The Hand Black Mate" panose="02010606010101020104" pitchFamily="2" charset="0"/>
-              </a:rPr>
-              <a:t>HTTP</a:t>
-            </a:r>
-            <a:endParaRPr lang="en-US" sz="2000" dirty="0">
-              <a:latin typeface="The Hand Black Mate" panose="02010606010101020104" pitchFamily="2" charset="0"/>
-            </a:endParaRPr>
-          </a:p>
-        </p:txBody>
-      </p:sp>
-      <p:sp>
-        <p:nvSpPr>
-          <p:cNvPr id="4" name="TextBox 3">
-            <a:extLst>
-              <a:ext uri="{FF2B5EF4-FFF2-40B4-BE49-F238E27FC236}">
-                <a16:creationId xmlns:a16="http://schemas.microsoft.com/office/drawing/2014/main" id="{3FF0D37C-7DA9-4AF7-87CB-FEEE254B1A40}"/>
-              </a:ext>
-            </a:extLst>
-          </p:cNvPr>
-          <p:cNvSpPr txBox="1"/>
-          <p:nvPr/>
-        </p:nvSpPr>
-        <p:spPr>
-          <a:xfrm>
-            <a:off x="9080395" y="4230957"/>
-            <a:ext cx="653913" cy="677108"/>
-          </a:xfrm>
-          <a:prstGeom prst="rect">
-            <a:avLst/>
-          </a:prstGeom>
-          <a:noFill/>
-        </p:spPr>
-        <p:txBody>
-          <a:bodyPr rot="0" spcFirstLastPara="0" vertOverflow="overflow" horzOverflow="overflow" vert="horz" wrap="square" lIns="91440" tIns="45720" rIns="91440" bIns="45720" numCol="1" spcCol="0" rtlCol="0" fromWordArt="0" anchor="t" anchorCtr="0" forceAA="0" compatLnSpc="1">
-            <a:prstTxWarp prst="textNoShape">
-              <a:avLst/>
-            </a:prstTxWarp>
-            <a:spAutoFit/>
-          </a:bodyPr>
-          <a:lstStyle/>
-          <a:p>
-            <a:r>
-              <a:rPr lang="en-US" sz="2000" dirty="0">
-                <a:latin typeface="The Hand Black Mate" panose="02010606010101020104" pitchFamily="2" charset="0"/>
-              </a:rPr>
-              <a:t>SQL</a:t>
-            </a:r>
-          </a:p>
-          <a:p>
-            <a:pPr algn="l"/>
-            <a:endParaRPr lang="en-US" dirty="0">
-              <a:latin typeface="The Hand Black Mate" panose="02010606010101020104" pitchFamily="2" charset="0"/>
-            </a:endParaRPr>
-          </a:p>
-        </p:txBody>
-      </p:sp>
-      <mc:AlternateContent xmlns:mc="http://schemas.openxmlformats.org/markup-compatibility/2006" xmlns:p14="http://schemas.microsoft.com/office/powerpoint/2010/main">
-        <mc:Choice Requires="p14">
-          <p:contentPart p14:bwMode="auto" r:id="rId11">
-            <p14:nvContentPartPr>
-              <p14:cNvPr id="17" name="Ink 16">
-                <a:extLst>
-                  <a:ext uri="{FF2B5EF4-FFF2-40B4-BE49-F238E27FC236}">
-                    <a16:creationId xmlns:a16="http://schemas.microsoft.com/office/drawing/2014/main" id="{8F03297D-1490-6B6E-DFB0-62BB55DA2129}"/>
-                  </a:ext>
-                </a:extLst>
-              </p14:cNvPr>
-              <p14:cNvContentPartPr/>
-              <p14:nvPr/>
-            </p14:nvContentPartPr>
-            <p14:xfrm>
-              <a:off x="8615537" y="1521783"/>
-              <a:ext cx="9991" cy="1013767"/>
-            </p14:xfrm>
-          </p:contentPart>
-        </mc:Choice>
-        <mc:Fallback xmlns="">
-          <p:pic>
-            <p:nvPicPr>
-              <p:cNvPr id="17" name="Ink 16">
-                <a:extLst>
-                  <a:ext uri="{FF2B5EF4-FFF2-40B4-BE49-F238E27FC236}">
-                    <a16:creationId xmlns:a16="http://schemas.microsoft.com/office/drawing/2014/main" id="{8F03297D-1490-6B6E-DFB0-62BB55DA2129}"/>
-                  </a:ext>
-                </a:extLst>
-              </p:cNvPr>
-              <p:cNvPicPr/>
-              <p:nvPr/>
-            </p:nvPicPr>
-            <p:blipFill>
-              <a:blip r:embed="rId12"/>
-              <a:stretch>
-                <a:fillRect/>
-              </a:stretch>
-            </p:blipFill>
-            <p:spPr>
-              <a:xfrm>
-                <a:off x="8598311" y="1503783"/>
-                <a:ext cx="44098" cy="1049407"/>
-              </a:xfrm>
-              <a:prstGeom prst="rect">
-                <a:avLst/>
-              </a:prstGeom>
-            </p:spPr>
-          </p:pic>
-        </mc:Fallback>
-      </mc:AlternateContent>
-      <p:pic>
-        <p:nvPicPr>
-          <p:cNvPr id="6" name="Picture 5">
-            <a:extLst>
-              <a:ext uri="{FF2B5EF4-FFF2-40B4-BE49-F238E27FC236}">
-                <a16:creationId xmlns:a16="http://schemas.microsoft.com/office/drawing/2014/main" id="{FC79A313-4809-C65C-0797-CE09770F07CC}"/>
-              </a:ext>
-            </a:extLst>
-          </p:cNvPr>
-          <p:cNvPicPr>
-            <a:picLocks noChangeAspect="1"/>
-          </p:cNvPicPr>
-          <p:nvPr/>
-        </p:nvPicPr>
-        <p:blipFill>
-          <a:blip r:embed="rId13"/>
-          <a:stretch>
-            <a:fillRect/>
-          </a:stretch>
-        </p:blipFill>
-        <p:spPr>
-          <a:xfrm>
-            <a:off x="9247478" y="5351277"/>
-            <a:ext cx="631092" cy="743212"/>
-          </a:xfrm>
-          <a:prstGeom prst="rect">
-            <a:avLst/>
-          </a:prstGeom>
-        </p:spPr>
-      </p:pic>
-      <p:sp>
-        <p:nvSpPr>
-          <p:cNvPr id="7" name="TextBox 6">
-            <a:extLst>
-              <a:ext uri="{FF2B5EF4-FFF2-40B4-BE49-F238E27FC236}">
-                <a16:creationId xmlns:a16="http://schemas.microsoft.com/office/drawing/2014/main" id="{815E327D-917D-6932-20E6-B5186A58EDD4}"/>
-              </a:ext>
-            </a:extLst>
-          </p:cNvPr>
-          <p:cNvSpPr txBox="1"/>
-          <p:nvPr/>
-        </p:nvSpPr>
-        <p:spPr>
-          <a:xfrm>
-            <a:off x="7828084" y="4225194"/>
-            <a:ext cx="626151" cy="677108"/>
-          </a:xfrm>
-          <a:prstGeom prst="rect">
-            <a:avLst/>
-          </a:prstGeom>
-          <a:noFill/>
-        </p:spPr>
-        <p:txBody>
-          <a:bodyPr rot="0" spcFirstLastPara="0" vertOverflow="overflow" horzOverflow="overflow" vert="horz" wrap="square" lIns="91440" tIns="45720" rIns="91440" bIns="45720" numCol="1" spcCol="0" rtlCol="0" fromWordArt="0" anchor="t" anchorCtr="0" forceAA="0" compatLnSpc="1">
-            <a:prstTxWarp prst="textNoShape">
-              <a:avLst/>
-            </a:prstTxWarp>
-            <a:spAutoFit/>
-          </a:bodyPr>
-          <a:lstStyle/>
-          <a:p>
-            <a:r>
-              <a:rPr lang="en-US" sz="2000" dirty="0">
-                <a:latin typeface="The Hand Black Mate" panose="02010606010101020104" pitchFamily="2" charset="0"/>
-              </a:rPr>
-              <a:t>RPC</a:t>
-            </a:r>
-          </a:p>
-          <a:p>
-            <a:pPr algn="l"/>
-            <a:endParaRPr lang="en-US" dirty="0">
-              <a:latin typeface="The Hand Black Mate" panose="02010606010101020104" pitchFamily="2" charset="0"/>
-            </a:endParaRPr>
-          </a:p>
-        </p:txBody>
-      </p:sp>
       <p:sp>
         <p:nvSpPr>
           <p:cNvPr id="9" name="Rectangle: Rounded Corners 8">
@@ -44059,216 +44091,6 @@
       </p:sp>
       <p:sp>
         <p:nvSpPr>
-          <p:cNvPr id="10" name="Rectangle: Rounded Corners 9">
-            <a:extLst>
-              <a:ext uri="{FF2B5EF4-FFF2-40B4-BE49-F238E27FC236}">
-                <a16:creationId xmlns:a16="http://schemas.microsoft.com/office/drawing/2014/main" id="{CE8D2C59-2A1D-6C0B-F474-8FD2AACD8C03}"/>
-              </a:ext>
-            </a:extLst>
-          </p:cNvPr>
-          <p:cNvSpPr/>
-          <p:nvPr/>
-        </p:nvSpPr>
-        <p:spPr>
-          <a:xfrm>
-            <a:off x="6786281" y="2537010"/>
-            <a:ext cx="3729316" cy="1255058"/>
-          </a:xfrm>
-          <a:prstGeom prst="roundRect">
-            <a:avLst/>
-          </a:prstGeom>
-          <a:noFill/>
-          <a:ln w="28575">
-            <a:solidFill>
-              <a:schemeClr val="accent1"/>
-            </a:solidFill>
-          </a:ln>
-        </p:spPr>
-        <p:style>
-          <a:lnRef idx="2">
-            <a:schemeClr val="accent1">
-              <a:shade val="15000"/>
-            </a:schemeClr>
-          </a:lnRef>
-          <a:fillRef idx="1">
-            <a:schemeClr val="accent1"/>
-          </a:fillRef>
-          <a:effectRef idx="0">
-            <a:schemeClr val="accent1"/>
-          </a:effectRef>
-          <a:fontRef idx="minor">
-            <a:schemeClr val="lt1"/>
-          </a:fontRef>
-        </p:style>
-        <p:txBody>
-          <a:bodyPr rtlCol="0" anchor="ctr"/>
-          <a:lstStyle/>
-          <a:p>
-            <a:pPr algn="ctr"/>
-            <a:endParaRPr lang="en-US">
-              <a:latin typeface="The Hand Black Mate" panose="02010606010101020104" pitchFamily="2" charset="0"/>
-            </a:endParaRPr>
-          </a:p>
-        </p:txBody>
-      </p:sp>
-      <p:sp>
-        <p:nvSpPr>
-          <p:cNvPr id="11" name="Rectangle: Rounded Corners 10">
-            <a:extLst>
-              <a:ext uri="{FF2B5EF4-FFF2-40B4-BE49-F238E27FC236}">
-                <a16:creationId xmlns:a16="http://schemas.microsoft.com/office/drawing/2014/main" id="{1BB6FD01-CDD5-B999-0D8E-7BF88FCF5560}"/>
-              </a:ext>
-            </a:extLst>
-          </p:cNvPr>
-          <p:cNvSpPr/>
-          <p:nvPr/>
-        </p:nvSpPr>
-        <p:spPr>
-          <a:xfrm>
-            <a:off x="6786281" y="5082510"/>
-            <a:ext cx="3729315" cy="1192305"/>
-          </a:xfrm>
-          <a:prstGeom prst="roundRect">
-            <a:avLst/>
-          </a:prstGeom>
-          <a:noFill/>
-          <a:ln w="28575">
-            <a:solidFill>
-              <a:schemeClr val="accent1"/>
-            </a:solidFill>
-          </a:ln>
-        </p:spPr>
-        <p:style>
-          <a:lnRef idx="2">
-            <a:schemeClr val="accent1">
-              <a:shade val="15000"/>
-            </a:schemeClr>
-          </a:lnRef>
-          <a:fillRef idx="1">
-            <a:schemeClr val="accent1"/>
-          </a:fillRef>
-          <a:effectRef idx="0">
-            <a:schemeClr val="accent1"/>
-          </a:effectRef>
-          <a:fontRef idx="minor">
-            <a:schemeClr val="lt1"/>
-          </a:fontRef>
-        </p:style>
-        <p:txBody>
-          <a:bodyPr rtlCol="0" anchor="ctr"/>
-          <a:lstStyle/>
-          <a:p>
-            <a:pPr algn="ctr"/>
-            <a:endParaRPr lang="en-US">
-              <a:latin typeface="The Hand Black Mate" panose="02010606010101020104" pitchFamily="2" charset="0"/>
-            </a:endParaRPr>
-          </a:p>
-        </p:txBody>
-      </p:sp>
-      <mc:AlternateContent xmlns:mc="http://schemas.openxmlformats.org/markup-compatibility/2006" xmlns:p14="http://schemas.microsoft.com/office/powerpoint/2010/main">
-        <mc:Choice Requires="p14">
-          <p:contentPart p14:bwMode="auto" r:id="rId14">
-            <p14:nvContentPartPr>
-              <p14:cNvPr id="12" name="Ink 11">
-                <a:extLst>
-                  <a:ext uri="{FF2B5EF4-FFF2-40B4-BE49-F238E27FC236}">
-                    <a16:creationId xmlns:a16="http://schemas.microsoft.com/office/drawing/2014/main" id="{9DAA0F3F-C1E8-61C5-344F-8B7C2B5A1AE9}"/>
-                  </a:ext>
-                </a:extLst>
-              </p14:cNvPr>
-              <p14:cNvContentPartPr/>
-              <p14:nvPr/>
-            </p14:nvContentPartPr>
-            <p14:xfrm rot="1320000">
-              <a:off x="8265942" y="3750489"/>
-              <a:ext cx="30221" cy="1580209"/>
-            </p14:xfrm>
-          </p:contentPart>
-        </mc:Choice>
-        <mc:Fallback xmlns="">
-          <p:pic>
-            <p:nvPicPr>
-              <p:cNvPr id="12" name="Ink 11">
-                <a:extLst>
-                  <a:ext uri="{FF2B5EF4-FFF2-40B4-BE49-F238E27FC236}">
-                    <a16:creationId xmlns:a16="http://schemas.microsoft.com/office/drawing/2014/main" id="{9DAA0F3F-C1E8-61C5-344F-8B7C2B5A1AE9}"/>
-                  </a:ext>
-                </a:extLst>
-              </p:cNvPr>
-              <p:cNvPicPr/>
-              <p:nvPr/>
-            </p:nvPicPr>
-            <p:blipFill>
-              <a:blip r:embed="rId15"/>
-              <a:stretch>
-                <a:fillRect/>
-              </a:stretch>
-            </p:blipFill>
-            <p:spPr>
-              <a:xfrm rot="1320000">
-                <a:off x="8248372" y="3732487"/>
-                <a:ext cx="65010" cy="1615853"/>
-              </a:xfrm>
-              <a:prstGeom prst="rect">
-                <a:avLst/>
-              </a:prstGeom>
-            </p:spPr>
-          </p:pic>
-        </mc:Fallback>
-      </mc:AlternateContent>
-      <mc:AlternateContent xmlns:mc="http://schemas.openxmlformats.org/markup-compatibility/2006" xmlns:p14="http://schemas.microsoft.com/office/powerpoint/2010/main">
-        <mc:Choice Requires="p14">
-          <p:contentPart p14:bwMode="auto" r:id="rId16">
-            <p14:nvContentPartPr>
-              <p14:cNvPr id="13" name="Ink 12">
-                <a:extLst>
-                  <a:ext uri="{FF2B5EF4-FFF2-40B4-BE49-F238E27FC236}">
-                    <a16:creationId xmlns:a16="http://schemas.microsoft.com/office/drawing/2014/main" id="{C05785D4-B04F-553B-CEEC-8A5BC8D8C139}"/>
-                  </a:ext>
-                </a:extLst>
-              </p14:cNvPr>
-              <p14:cNvContentPartPr/>
-              <p14:nvPr/>
-            </p14:nvContentPartPr>
-            <p14:xfrm rot="20280000">
-              <a:off x="9038057" y="3733486"/>
-              <a:ext cx="90910" cy="1640899"/>
-            </p14:xfrm>
-          </p:contentPart>
-        </mc:Choice>
-        <mc:Fallback xmlns="">
-          <p:pic>
-            <p:nvPicPr>
-              <p:cNvPr id="13" name="Ink 12">
-                <a:extLst>
-                  <a:ext uri="{FF2B5EF4-FFF2-40B4-BE49-F238E27FC236}">
-                    <a16:creationId xmlns:a16="http://schemas.microsoft.com/office/drawing/2014/main" id="{C05785D4-B04F-553B-CEEC-8A5BC8D8C139}"/>
-                  </a:ext>
-                </a:extLst>
-              </p:cNvPr>
-              <p:cNvPicPr/>
-              <p:nvPr/>
-            </p:nvPicPr>
-            <p:blipFill>
-              <a:blip r:embed="rId17"/>
-              <a:stretch>
-                <a:fillRect/>
-              </a:stretch>
-            </p:blipFill>
-            <p:spPr>
-              <a:xfrm rot="20280000">
-                <a:off x="9020232" y="3715482"/>
-                <a:ext cx="126204" cy="1676547"/>
-              </a:xfrm>
-              <a:prstGeom prst="rect">
-                <a:avLst/>
-              </a:prstGeom>
-            </p:spPr>
-          </p:pic>
-        </mc:Fallback>
-      </mc:AlternateContent>
-      <p:sp>
-        <p:nvSpPr>
           <p:cNvPr id="5" name="TextBox 4">
             <a:extLst>
               <a:ext uri="{FF2B5EF4-FFF2-40B4-BE49-F238E27FC236}">
@@ -44326,7 +44148,7 @@
           <p:nvPr/>
         </p:nvPicPr>
         <p:blipFill>
-          <a:blip r:embed="rId18"/>
+          <a:blip r:embed="rId10"/>
           <a:stretch>
             <a:fillRect/>
           </a:stretch>
@@ -44355,8 +44177,8 @@
         </p:nvSpPr>
         <p:spPr>
           <a:xfrm>
-            <a:off x="188043" y="2859216"/>
-            <a:ext cx="8778383" cy="1200329"/>
+            <a:off x="188044" y="2859216"/>
+            <a:ext cx="6598238" cy="1477328"/>
           </a:xfrm>
           <a:prstGeom prst="rect">
             <a:avLst/>
@@ -44476,6 +44298,542 @@
               <a:ea typeface="Aptos" panose="020B0004020202020204" pitchFamily="34" charset="0"/>
               <a:cs typeface="Times New Roman" panose="02020603050405020304" pitchFamily="18" charset="0"/>
             </a:endParaRPr>
+          </a:p>
+        </p:txBody>
+      </p:sp>
+      <p:cxnSp>
+        <p:nvCxnSpPr>
+          <p:cNvPr id="18" name="Straight Connector 17">
+            <a:extLst>
+              <a:ext uri="{FF2B5EF4-FFF2-40B4-BE49-F238E27FC236}">
+                <a16:creationId xmlns:a16="http://schemas.microsoft.com/office/drawing/2014/main" id="{0D88D8D8-46AF-EEA9-D5B9-EE9F7114BCCF}"/>
+              </a:ext>
+            </a:extLst>
+          </p:cNvPr>
+          <p:cNvCxnSpPr>
+            <a:stCxn id="9" idx="2"/>
+          </p:cNvCxnSpPr>
+          <p:nvPr/>
+        </p:nvCxnSpPr>
+        <p:spPr>
+          <a:xfrm>
+            <a:off x="8650939" y="1518706"/>
+            <a:ext cx="922907" cy="1764704"/>
+          </a:xfrm>
+          <a:prstGeom prst="line">
+            <a:avLst/>
+          </a:prstGeom>
+        </p:spPr>
+        <p:style>
+          <a:lnRef idx="1">
+            <a:schemeClr val="accent1"/>
+          </a:lnRef>
+          <a:fillRef idx="0">
+            <a:schemeClr val="accent1"/>
+          </a:fillRef>
+          <a:effectRef idx="0">
+            <a:schemeClr val="accent1"/>
+          </a:effectRef>
+          <a:fontRef idx="minor">
+            <a:schemeClr val="tx1"/>
+          </a:fontRef>
+        </p:style>
+      </p:cxnSp>
+      <p:cxnSp>
+        <p:nvCxnSpPr>
+          <p:cNvPr id="22" name="Straight Connector 21">
+            <a:extLst>
+              <a:ext uri="{FF2B5EF4-FFF2-40B4-BE49-F238E27FC236}">
+                <a16:creationId xmlns:a16="http://schemas.microsoft.com/office/drawing/2014/main" id="{D5B8416F-BB84-3F70-9FF6-48A9C8728502}"/>
+              </a:ext>
+            </a:extLst>
+          </p:cNvPr>
+          <p:cNvCxnSpPr>
+            <a:cxnSpLocks/>
+            <a:stCxn id="24" idx="2"/>
+            <a:endCxn id="6" idx="0"/>
+          </p:cNvCxnSpPr>
+          <p:nvPr/>
+        </p:nvCxnSpPr>
+        <p:spPr>
+          <a:xfrm>
+            <a:off x="9688121" y="4013489"/>
+            <a:ext cx="90337" cy="438834"/>
+          </a:xfrm>
+          <a:prstGeom prst="line">
+            <a:avLst/>
+          </a:prstGeom>
+        </p:spPr>
+        <p:style>
+          <a:lnRef idx="1">
+            <a:schemeClr val="accent1"/>
+          </a:lnRef>
+          <a:fillRef idx="0">
+            <a:schemeClr val="accent1"/>
+          </a:fillRef>
+          <a:effectRef idx="0">
+            <a:schemeClr val="accent1"/>
+          </a:effectRef>
+          <a:fontRef idx="minor">
+            <a:schemeClr val="tx1"/>
+          </a:fontRef>
+        </p:style>
+      </p:cxnSp>
+      <p:pic>
+        <p:nvPicPr>
+          <p:cNvPr id="23" name="Picture 22">
+            <a:extLst>
+              <a:ext uri="{FF2B5EF4-FFF2-40B4-BE49-F238E27FC236}">
+                <a16:creationId xmlns:a16="http://schemas.microsoft.com/office/drawing/2014/main" id="{18451E82-5D06-D5A8-211B-AE8D2F540495}"/>
+              </a:ext>
+            </a:extLst>
+          </p:cNvPr>
+          <p:cNvPicPr>
+            <a:picLocks noChangeAspect="1"/>
+          </p:cNvPicPr>
+          <p:nvPr/>
+        </p:nvPicPr>
+        <p:blipFill>
+          <a:blip r:embed="rId11"/>
+          <a:stretch>
+            <a:fillRect/>
+          </a:stretch>
+        </p:blipFill>
+        <p:spPr>
+          <a:xfrm>
+            <a:off x="7379846" y="3292392"/>
+            <a:ext cx="747223" cy="721097"/>
+          </a:xfrm>
+          <a:prstGeom prst="rect">
+            <a:avLst/>
+          </a:prstGeom>
+        </p:spPr>
+      </p:pic>
+      <p:pic>
+        <p:nvPicPr>
+          <p:cNvPr id="24" name="Picture 23">
+            <a:extLst>
+              <a:ext uri="{FF2B5EF4-FFF2-40B4-BE49-F238E27FC236}">
+                <a16:creationId xmlns:a16="http://schemas.microsoft.com/office/drawing/2014/main" id="{47D9DDDE-5CE8-FA19-6A86-8857E6805958}"/>
+              </a:ext>
+            </a:extLst>
+          </p:cNvPr>
+          <p:cNvPicPr>
+            <a:picLocks noChangeAspect="1"/>
+          </p:cNvPicPr>
+          <p:nvPr/>
+        </p:nvPicPr>
+        <p:blipFill>
+          <a:blip r:embed="rId11"/>
+          <a:stretch>
+            <a:fillRect/>
+          </a:stretch>
+        </p:blipFill>
+        <p:spPr>
+          <a:xfrm>
+            <a:off x="9314509" y="3292392"/>
+            <a:ext cx="747223" cy="721097"/>
+          </a:xfrm>
+          <a:prstGeom prst="rect">
+            <a:avLst/>
+          </a:prstGeom>
+        </p:spPr>
+      </p:pic>
+      <p:cxnSp>
+        <p:nvCxnSpPr>
+          <p:cNvPr id="27" name="Straight Connector 26">
+            <a:extLst>
+              <a:ext uri="{FF2B5EF4-FFF2-40B4-BE49-F238E27FC236}">
+                <a16:creationId xmlns:a16="http://schemas.microsoft.com/office/drawing/2014/main" id="{A4F0B8E5-44FC-08C3-2FD0-A9DA8674B2FD}"/>
+              </a:ext>
+            </a:extLst>
+          </p:cNvPr>
+          <p:cNvCxnSpPr>
+            <a:cxnSpLocks/>
+            <a:stCxn id="9" idx="2"/>
+            <a:endCxn id="23" idx="0"/>
+          </p:cNvCxnSpPr>
+          <p:nvPr/>
+        </p:nvCxnSpPr>
+        <p:spPr>
+          <a:xfrm flipH="1">
+            <a:off x="7753458" y="1518706"/>
+            <a:ext cx="897481" cy="1773686"/>
+          </a:xfrm>
+          <a:prstGeom prst="line">
+            <a:avLst/>
+          </a:prstGeom>
+        </p:spPr>
+        <p:style>
+          <a:lnRef idx="1">
+            <a:schemeClr val="accent1"/>
+          </a:lnRef>
+          <a:fillRef idx="0">
+            <a:schemeClr val="accent1"/>
+          </a:fillRef>
+          <a:effectRef idx="0">
+            <a:schemeClr val="accent1"/>
+          </a:effectRef>
+          <a:fontRef idx="minor">
+            <a:schemeClr val="tx1"/>
+          </a:fontRef>
+        </p:style>
+      </p:cxnSp>
+      <p:cxnSp>
+        <p:nvCxnSpPr>
+          <p:cNvPr id="29" name="Straight Connector 28">
+            <a:extLst>
+              <a:ext uri="{FF2B5EF4-FFF2-40B4-BE49-F238E27FC236}">
+                <a16:creationId xmlns:a16="http://schemas.microsoft.com/office/drawing/2014/main" id="{03DF2D47-20BF-57CA-E08D-5E17925999E0}"/>
+              </a:ext>
+            </a:extLst>
+          </p:cNvPr>
+          <p:cNvCxnSpPr>
+            <a:cxnSpLocks/>
+            <a:stCxn id="23" idx="2"/>
+            <a:endCxn id="30" idx="0"/>
+          </p:cNvCxnSpPr>
+          <p:nvPr/>
+        </p:nvCxnSpPr>
+        <p:spPr>
+          <a:xfrm>
+            <a:off x="7753458" y="4013489"/>
+            <a:ext cx="17699" cy="393054"/>
+          </a:xfrm>
+          <a:prstGeom prst="line">
+            <a:avLst/>
+          </a:prstGeom>
+        </p:spPr>
+        <p:style>
+          <a:lnRef idx="1">
+            <a:schemeClr val="accent1"/>
+          </a:lnRef>
+          <a:fillRef idx="0">
+            <a:schemeClr val="accent1"/>
+          </a:fillRef>
+          <a:effectRef idx="0">
+            <a:schemeClr val="accent1"/>
+          </a:effectRef>
+          <a:fontRef idx="minor">
+            <a:schemeClr val="tx1"/>
+          </a:fontRef>
+        </p:style>
+      </p:cxnSp>
+      <p:pic>
+        <p:nvPicPr>
+          <p:cNvPr id="30" name="Picture 29">
+            <a:extLst>
+              <a:ext uri="{FF2B5EF4-FFF2-40B4-BE49-F238E27FC236}">
+                <a16:creationId xmlns:a16="http://schemas.microsoft.com/office/drawing/2014/main" id="{CC5BD977-222C-2EA5-1895-700A70FEB553}"/>
+              </a:ext>
+            </a:extLst>
+          </p:cNvPr>
+          <p:cNvPicPr>
+            <a:picLocks noChangeAspect="1"/>
+          </p:cNvPicPr>
+          <p:nvPr/>
+        </p:nvPicPr>
+        <p:blipFill>
+          <a:blip r:embed="rId9"/>
+          <a:stretch>
+            <a:fillRect/>
+          </a:stretch>
+        </p:blipFill>
+        <p:spPr>
+          <a:xfrm>
+            <a:off x="7532361" y="4406543"/>
+            <a:ext cx="477592" cy="562441"/>
+          </a:xfrm>
+          <a:prstGeom prst="rect">
+            <a:avLst/>
+          </a:prstGeom>
+        </p:spPr>
+      </p:pic>
+      <p:sp>
+        <p:nvSpPr>
+          <p:cNvPr id="31" name="Rectangle: Rounded Corners 30">
+            <a:extLst>
+              <a:ext uri="{FF2B5EF4-FFF2-40B4-BE49-F238E27FC236}">
+                <a16:creationId xmlns:a16="http://schemas.microsoft.com/office/drawing/2014/main" id="{06A62A02-D5C8-0CA9-396D-D4393953EC2E}"/>
+              </a:ext>
+            </a:extLst>
+          </p:cNvPr>
+          <p:cNvSpPr/>
+          <p:nvPr/>
+        </p:nvSpPr>
+        <p:spPr>
+          <a:xfrm>
+            <a:off x="9090195" y="2904021"/>
+            <a:ext cx="1288227" cy="1255058"/>
+          </a:xfrm>
+          <a:prstGeom prst="roundRect">
+            <a:avLst/>
+          </a:prstGeom>
+          <a:noFill/>
+          <a:ln w="28575">
+            <a:solidFill>
+              <a:schemeClr val="accent1"/>
+            </a:solidFill>
+          </a:ln>
+        </p:spPr>
+        <p:style>
+          <a:lnRef idx="2">
+            <a:schemeClr val="accent1">
+              <a:shade val="15000"/>
+            </a:schemeClr>
+          </a:lnRef>
+          <a:fillRef idx="1">
+            <a:schemeClr val="accent1"/>
+          </a:fillRef>
+          <a:effectRef idx="0">
+            <a:schemeClr val="accent1"/>
+          </a:effectRef>
+          <a:fontRef idx="minor">
+            <a:schemeClr val="lt1"/>
+          </a:fontRef>
+        </p:style>
+        <p:txBody>
+          <a:bodyPr rtlCol="0" anchor="ctr"/>
+          <a:lstStyle/>
+          <a:p>
+            <a:pPr algn="ctr"/>
+            <a:endParaRPr lang="en-US">
+              <a:latin typeface="The Hand Black Mate" panose="02010606010101020104" pitchFamily="2" charset="0"/>
+            </a:endParaRPr>
+          </a:p>
+        </p:txBody>
+      </p:sp>
+      <p:sp>
+        <p:nvSpPr>
+          <p:cNvPr id="37" name="TextBox 36">
+            <a:extLst>
+              <a:ext uri="{FF2B5EF4-FFF2-40B4-BE49-F238E27FC236}">
+                <a16:creationId xmlns:a16="http://schemas.microsoft.com/office/drawing/2014/main" id="{5F23BD85-5681-835A-7EA3-4B26BDB0206E}"/>
+              </a:ext>
+            </a:extLst>
+          </p:cNvPr>
+          <p:cNvSpPr txBox="1"/>
+          <p:nvPr/>
+        </p:nvSpPr>
+        <p:spPr>
+          <a:xfrm>
+            <a:off x="9369263" y="2914078"/>
+            <a:ext cx="723275" cy="369332"/>
+          </a:xfrm>
+          <a:prstGeom prst="rect">
+            <a:avLst/>
+          </a:prstGeom>
+          <a:noFill/>
+        </p:spPr>
+        <p:txBody>
+          <a:bodyPr wrap="none" rtlCol="0">
+            <a:spAutoFit/>
+          </a:bodyPr>
+          <a:lstStyle/>
+          <a:p>
+            <a:r>
+              <a:rPr lang="en-US" dirty="0"/>
+              <a:t>Auth </a:t>
+            </a:r>
+            <a:endParaRPr lang="ro-RO" dirty="0"/>
+          </a:p>
+        </p:txBody>
+      </p:sp>
+      <p:sp>
+        <p:nvSpPr>
+          <p:cNvPr id="38" name="TextBox 37">
+            <a:extLst>
+              <a:ext uri="{FF2B5EF4-FFF2-40B4-BE49-F238E27FC236}">
+                <a16:creationId xmlns:a16="http://schemas.microsoft.com/office/drawing/2014/main" id="{3A63534E-8172-D47F-B6D6-02418F375ECC}"/>
+              </a:ext>
+            </a:extLst>
+          </p:cNvPr>
+          <p:cNvSpPr txBox="1"/>
+          <p:nvPr/>
+        </p:nvSpPr>
+        <p:spPr>
+          <a:xfrm>
+            <a:off x="7174748" y="2941459"/>
+            <a:ext cx="1236236" cy="369332"/>
+          </a:xfrm>
+          <a:prstGeom prst="rect">
+            <a:avLst/>
+          </a:prstGeom>
+          <a:noFill/>
+        </p:spPr>
+        <p:txBody>
+          <a:bodyPr wrap="none" rtlCol="0">
+            <a:spAutoFit/>
+          </a:bodyPr>
+          <a:lstStyle/>
+          <a:p>
+            <a:r>
+              <a:rPr lang="en-US" dirty="0"/>
+              <a:t>Resource </a:t>
+            </a:r>
+            <a:endParaRPr lang="ro-RO" dirty="0"/>
+          </a:p>
+        </p:txBody>
+      </p:sp>
+      <p:sp>
+        <p:nvSpPr>
+          <p:cNvPr id="39" name="Rectangle: Rounded Corners 38">
+            <a:extLst>
+              <a:ext uri="{FF2B5EF4-FFF2-40B4-BE49-F238E27FC236}">
+                <a16:creationId xmlns:a16="http://schemas.microsoft.com/office/drawing/2014/main" id="{13BAF630-C997-1CE1-A907-07AC1771F849}"/>
+              </a:ext>
+            </a:extLst>
+          </p:cNvPr>
+          <p:cNvSpPr/>
+          <p:nvPr/>
+        </p:nvSpPr>
+        <p:spPr>
+          <a:xfrm>
+            <a:off x="7105295" y="2914078"/>
+            <a:ext cx="1288227" cy="1255058"/>
+          </a:xfrm>
+          <a:prstGeom prst="roundRect">
+            <a:avLst/>
+          </a:prstGeom>
+          <a:noFill/>
+          <a:ln w="28575">
+            <a:solidFill>
+              <a:schemeClr val="accent1"/>
+            </a:solidFill>
+          </a:ln>
+        </p:spPr>
+        <p:style>
+          <a:lnRef idx="2">
+            <a:schemeClr val="accent1">
+              <a:shade val="15000"/>
+            </a:schemeClr>
+          </a:lnRef>
+          <a:fillRef idx="1">
+            <a:schemeClr val="accent1"/>
+          </a:fillRef>
+          <a:effectRef idx="0">
+            <a:schemeClr val="accent1"/>
+          </a:effectRef>
+          <a:fontRef idx="minor">
+            <a:schemeClr val="lt1"/>
+          </a:fontRef>
+        </p:style>
+        <p:txBody>
+          <a:bodyPr rtlCol="0" anchor="ctr"/>
+          <a:lstStyle/>
+          <a:p>
+            <a:pPr algn="ctr"/>
+            <a:endParaRPr lang="en-US">
+              <a:latin typeface="The Hand Black Mate" panose="02010606010101020104" pitchFamily="2" charset="0"/>
+            </a:endParaRPr>
+          </a:p>
+        </p:txBody>
+      </p:sp>
+      <p:sp>
+        <p:nvSpPr>
+          <p:cNvPr id="41" name="TextBox 40">
+            <a:extLst>
+              <a:ext uri="{FF2B5EF4-FFF2-40B4-BE49-F238E27FC236}">
+                <a16:creationId xmlns:a16="http://schemas.microsoft.com/office/drawing/2014/main" id="{E46F48FA-9049-C4CD-6C83-F16B6ADA4FD9}"/>
+              </a:ext>
+            </a:extLst>
+          </p:cNvPr>
+          <p:cNvSpPr txBox="1"/>
+          <p:nvPr/>
+        </p:nvSpPr>
+        <p:spPr>
+          <a:xfrm>
+            <a:off x="7479510" y="2161732"/>
+            <a:ext cx="847348" cy="369332"/>
+          </a:xfrm>
+          <a:prstGeom prst="rect">
+            <a:avLst/>
+          </a:prstGeom>
+          <a:noFill/>
+        </p:spPr>
+        <p:txBody>
+          <a:bodyPr wrap="none" rtlCol="0">
+            <a:spAutoFit/>
+          </a:bodyPr>
+          <a:lstStyle/>
+          <a:p>
+            <a:r>
+              <a:rPr lang="en-US" dirty="0"/>
+              <a:t>HTTP </a:t>
+            </a:r>
+            <a:endParaRPr lang="ro-RO" dirty="0"/>
+          </a:p>
+        </p:txBody>
+      </p:sp>
+      <p:sp>
+        <p:nvSpPr>
+          <p:cNvPr id="42" name="TextBox 41">
+            <a:extLst>
+              <a:ext uri="{FF2B5EF4-FFF2-40B4-BE49-F238E27FC236}">
+                <a16:creationId xmlns:a16="http://schemas.microsoft.com/office/drawing/2014/main" id="{CB106221-A891-8DFD-1DAC-157207D1DA97}"/>
+              </a:ext>
+            </a:extLst>
+          </p:cNvPr>
+          <p:cNvSpPr txBox="1"/>
+          <p:nvPr/>
+        </p:nvSpPr>
+        <p:spPr>
+          <a:xfrm>
+            <a:off x="9124746" y="2156914"/>
+            <a:ext cx="847348" cy="369332"/>
+          </a:xfrm>
+          <a:prstGeom prst="rect">
+            <a:avLst/>
+          </a:prstGeom>
+          <a:noFill/>
+        </p:spPr>
+        <p:txBody>
+          <a:bodyPr wrap="none" rtlCol="0">
+            <a:spAutoFit/>
+          </a:bodyPr>
+          <a:lstStyle/>
+          <a:p>
+            <a:r>
+              <a:rPr lang="en-US" dirty="0"/>
+              <a:t>HTTP </a:t>
+            </a:r>
+            <a:endParaRPr lang="ro-RO" dirty="0"/>
+          </a:p>
+        </p:txBody>
+      </p:sp>
+      <p:sp>
+        <p:nvSpPr>
+          <p:cNvPr id="46" name="TextBox 45">
+            <a:extLst>
+              <a:ext uri="{FF2B5EF4-FFF2-40B4-BE49-F238E27FC236}">
+                <a16:creationId xmlns:a16="http://schemas.microsoft.com/office/drawing/2014/main" id="{35F16CF1-E1E3-05AD-8DCF-CC23A0A567AF}"/>
+              </a:ext>
+            </a:extLst>
+          </p:cNvPr>
+          <p:cNvSpPr txBox="1"/>
+          <p:nvPr/>
+        </p:nvSpPr>
+        <p:spPr>
+          <a:xfrm>
+            <a:off x="8202738" y="277768"/>
+            <a:ext cx="774571" cy="369332"/>
+          </a:xfrm>
+          <a:prstGeom prst="rect">
+            <a:avLst/>
+          </a:prstGeom>
+          <a:noFill/>
+        </p:spPr>
+        <p:txBody>
+          <a:bodyPr wrap="none" rtlCol="0">
+            <a:spAutoFit/>
+          </a:bodyPr>
+          <a:lstStyle/>
+          <a:p>
+            <a:r>
+              <a:rPr lang="en-US" dirty="0"/>
+              <a:t>Client</a:t>
+            </a:r>
+            <a:endParaRPr lang="ro-RO" dirty="0"/>
           </a:p>
         </p:txBody>
       </p:sp>
@@ -44563,6 +44921,19 @@
               </a:rPr>
               <a:t>Schnorr</a:t>
             </a:r>
+            <a:br>
+              <a:rPr lang="en-US" sz="4000" dirty="0">
+                <a:latin typeface="Segoe UI" panose="020B0502040204020203" pitchFamily="34" charset="0"/>
+                <a:cs typeface="Segoe UI" panose="020B0502040204020203" pitchFamily="34" charset="0"/>
+              </a:rPr>
+            </a:br>
+            <a:r>
+              <a:rPr lang="en-US" sz="4000" dirty="0">
+                <a:latin typeface="Segoe UI" panose="020B0502040204020203" pitchFamily="34" charset="0"/>
+                <a:cs typeface="Segoe UI" panose="020B0502040204020203" pitchFamily="34" charset="0"/>
+              </a:rPr>
+              <a:t>interactive</a:t>
+            </a:r>
           </a:p>
         </p:txBody>
       </p:sp>
@@ -44613,8 +44984,47 @@
                 <a:latin typeface="Segoe UI" panose="020B0502040204020203" pitchFamily="34" charset="0"/>
                 <a:cs typeface="Segoe UI" panose="020B0502040204020203" pitchFamily="34" charset="0"/>
               </a:rPr>
-              <a:t>P = 2Q + 1 (prim sigur), G = h² mod P, G ≠ 1, G^Q mod P = 1</a:t>
-            </a:r>
+              <a:t>prim sigur</a:t>
+            </a:r>
+            <a:r>
+              <a:rPr lang="en-US" dirty="0">
+                <a:latin typeface="Segoe UI" panose="020B0502040204020203" pitchFamily="34" charset="0"/>
+                <a:cs typeface="Segoe UI" panose="020B0502040204020203" pitchFamily="34" charset="0"/>
+              </a:rPr>
+              <a:t> </a:t>
+            </a:r>
+            <a:r>
+              <a:rPr lang="ro-RO" dirty="0">
+                <a:latin typeface="Segoe UI" panose="020B0502040204020203" pitchFamily="34" charset="0"/>
+                <a:cs typeface="Segoe UI" panose="020B0502040204020203" pitchFamily="34" charset="0"/>
+              </a:rPr>
+              <a:t>P = 2Q + 1, G = h² mod P, G ≠ 1, G^Q mod P =</a:t>
+            </a:r>
+            <a:r>
+              <a:rPr lang="en-US" dirty="0">
+                <a:latin typeface="Segoe UI" panose="020B0502040204020203" pitchFamily="34" charset="0"/>
+                <a:cs typeface="Segoe UI" panose="020B0502040204020203" pitchFamily="34" charset="0"/>
+              </a:rPr>
+              <a:t>=</a:t>
+            </a:r>
+            <a:r>
+              <a:rPr lang="ro-RO" dirty="0">
+                <a:latin typeface="Segoe UI" panose="020B0502040204020203" pitchFamily="34" charset="0"/>
+                <a:cs typeface="Segoe UI" panose="020B0502040204020203" pitchFamily="34" charset="0"/>
+              </a:rPr>
+              <a:t> 1</a:t>
+            </a:r>
+            <a:r>
+              <a:rPr lang="en-US" dirty="0">
+                <a:latin typeface="Segoe UI" panose="020B0502040204020203" pitchFamily="34" charset="0"/>
+                <a:cs typeface="Segoe UI" panose="020B0502040204020203" pitchFamily="34" charset="0"/>
+              </a:rPr>
+              <a:t>, h in [0,P]</a:t>
+            </a:r>
+            <a:endParaRPr lang="ro-RO" dirty="0">
+              <a:latin typeface="Segoe UI" panose="020B0502040204020203" pitchFamily="34" charset="0"/>
+              <a:cs typeface="Segoe UI" panose="020B0502040204020203" pitchFamily="34" charset="0"/>
+            </a:endParaRPr>
           </a:p>
         </p:txBody>
       </p:sp>
@@ -44706,7 +45116,7 @@
         </p:nvSpPr>
         <p:spPr>
           <a:xfrm>
-            <a:off x="5905174" y="1346624"/>
+            <a:off x="6209974" y="1310537"/>
             <a:ext cx="6097772" cy="2804037"/>
           </a:xfrm>
           <a:prstGeom prst="rect">
@@ -45145,8 +45555,8 @@
         </p:nvSpPr>
         <p:spPr>
           <a:xfrm>
-            <a:off x="212558" y="2334555"/>
-            <a:ext cx="6103088" cy="2688621"/>
+            <a:off x="145312" y="2162616"/>
+            <a:ext cx="3144965" cy="2940485"/>
           </a:xfrm>
           <a:prstGeom prst="rect">
             <a:avLst/>
@@ -45174,7 +45584,7 @@
               </a:tabLst>
             </a:pPr>
             <a:r>
-              <a:rPr lang="ro-RO" sz="1800" kern="0" dirty="0">
+              <a:rPr lang="ro-RO" sz="1400" kern="0" dirty="0">
                 <a:effectLst/>
                 <a:latin typeface="Segoe UI" panose="020B0502040204020203" pitchFamily="34" charset="0"/>
                 <a:ea typeface="Times New Roman" panose="02020603050405020304" pitchFamily="18" charset="0"/>
@@ -45182,7 +45592,7 @@
               </a:rPr>
               <a:t>Client: derivare locală x din parolă (scrypt + salt unic)</a:t>
             </a:r>
-            <a:endParaRPr lang="ro-RO" sz="2800" kern="100" dirty="0">
+            <a:endParaRPr lang="ro-RO" sz="1400" kern="100" dirty="0">
               <a:effectLst/>
               <a:latin typeface="Aptos" panose="020B0004020202020204" pitchFamily="34" charset="0"/>
               <a:ea typeface="Aptos" panose="020B0004020202020204" pitchFamily="34" charset="0"/>
@@ -45205,7 +45615,7 @@
               </a:tabLst>
             </a:pPr>
             <a:r>
-              <a:rPr lang="ro-RO" sz="1800" kern="0" dirty="0">
+              <a:rPr lang="ro-RO" sz="1400" kern="0" dirty="0">
                 <a:effectLst/>
                 <a:latin typeface="Segoe UI" panose="020B0502040204020203" pitchFamily="34" charset="0"/>
                 <a:ea typeface="Times New Roman" panose="02020603050405020304" pitchFamily="18" charset="0"/>
@@ -45213,7 +45623,7 @@
               </a:rPr>
               <a:t>Calcul: y = G^x mod P</a:t>
             </a:r>
-            <a:endParaRPr lang="ro-RO" sz="2800" kern="100" dirty="0">
+            <a:endParaRPr lang="ro-RO" sz="1400" kern="100" dirty="0">
               <a:effectLst/>
               <a:latin typeface="Aptos" panose="020B0004020202020204" pitchFamily="34" charset="0"/>
               <a:ea typeface="Aptos" panose="020B0004020202020204" pitchFamily="34" charset="0"/>
@@ -45236,7 +45646,7 @@
               </a:tabLst>
             </a:pPr>
             <a:r>
-              <a:rPr lang="ro-RO" sz="1800" kern="0" dirty="0">
+              <a:rPr lang="ro-RO" sz="1400" kern="0" dirty="0">
                 <a:effectLst/>
                 <a:latin typeface="Segoe UI" panose="020B0502040204020203" pitchFamily="34" charset="0"/>
                 <a:ea typeface="Times New Roman" panose="02020603050405020304" pitchFamily="18" charset="0"/>
@@ -45244,7 +45654,7 @@
               </a:rPr>
               <a:t>Transmis → server: exclusiv y</a:t>
             </a:r>
-            <a:endParaRPr lang="ro-RO" sz="2800" kern="100" dirty="0">
+            <a:endParaRPr lang="ro-RO" sz="1400" kern="100" dirty="0">
               <a:effectLst/>
               <a:latin typeface="Aptos" panose="020B0004020202020204" pitchFamily="34" charset="0"/>
               <a:ea typeface="Aptos" panose="020B0004020202020204" pitchFamily="34" charset="0"/>
@@ -45267,7 +45677,7 @@
               </a:tabLst>
             </a:pPr>
             <a:r>
-              <a:rPr lang="ro-RO" sz="1800" kern="0" dirty="0">
+              <a:rPr lang="ro-RO" sz="1400" kern="0" dirty="0">
                 <a:effectLst/>
                 <a:latin typeface="Segoe UI" panose="020B0502040204020203" pitchFamily="34" charset="0"/>
                 <a:ea typeface="Times New Roman" panose="02020603050405020304" pitchFamily="18" charset="0"/>
@@ -45276,7 +45686,7 @@
               <a:t>Server: validare y^Q mod P = 1, y </a:t>
             </a:r>
             <a:r>
-              <a:rPr lang="ro-RO" sz="1800" kern="0" dirty="0">
+              <a:rPr lang="ro-RO" sz="1400" kern="0" dirty="0">
                 <a:effectLst/>
                 <a:latin typeface="Cambria Math" panose="02040503050406030204" pitchFamily="18" charset="0"/>
                 <a:ea typeface="Times New Roman" panose="02020603050405020304" pitchFamily="18" charset="0"/>
@@ -45285,7 +45695,7 @@
               <a:t>∉</a:t>
             </a:r>
             <a:r>
-              <a:rPr lang="ro-RO" sz="1800" kern="0" dirty="0">
+              <a:rPr lang="ro-RO" sz="1400" kern="0" dirty="0">
                 <a:effectLst/>
                 <a:latin typeface="Segoe UI" panose="020B0502040204020203" pitchFamily="34" charset="0"/>
                 <a:ea typeface="Times New Roman" panose="02020603050405020304" pitchFamily="18" charset="0"/>
@@ -45293,7 +45703,7 @@
               </a:rPr>
               <a:t> {0, 1, -1, P-1} → stocare</a:t>
             </a:r>
-            <a:endParaRPr lang="ro-RO" sz="2800" kern="100" dirty="0">
+            <a:endParaRPr lang="ro-RO" sz="1400" kern="100" dirty="0">
               <a:effectLst/>
               <a:latin typeface="Aptos" panose="020B0004020202020204" pitchFamily="34" charset="0"/>
               <a:ea typeface="Aptos" panose="020B0004020202020204" pitchFamily="34" charset="0"/>
@@ -45316,7 +45726,7 @@
               </a:tabLst>
             </a:pPr>
             <a:r>
-              <a:rPr lang="ro-RO" sz="1800" kern="0" dirty="0">
+              <a:rPr lang="ro-RO" sz="1400" kern="0" dirty="0">
                 <a:effectLst/>
                 <a:latin typeface="Segoe UI" panose="020B0502040204020203" pitchFamily="34" charset="0"/>
                 <a:ea typeface="Times New Roman" panose="02020603050405020304" pitchFamily="18" charset="0"/>
@@ -45324,7 +45734,7 @@
               </a:rPr>
               <a:t>Parolă + cheie privată: nu părăsesc dispozitivul</a:t>
             </a:r>
-            <a:endParaRPr lang="ro-RO" sz="2800" kern="100" dirty="0">
+            <a:endParaRPr lang="ro-RO" sz="1400" kern="100" dirty="0">
               <a:effectLst/>
               <a:latin typeface="Aptos" panose="020B0004020202020204" pitchFamily="34" charset="0"/>
               <a:ea typeface="Aptos" panose="020B0004020202020204" pitchFamily="34" charset="0"/>
@@ -45347,7 +45757,7 @@
               </a:tabLst>
             </a:pPr>
             <a:r>
-              <a:rPr lang="ro-RO" sz="1800" kern="0" dirty="0">
+              <a:rPr lang="ro-RO" sz="1400" kern="0" dirty="0">
                 <a:effectLst/>
                 <a:latin typeface="Segoe UI" panose="020B0502040204020203" pitchFamily="34" charset="0"/>
                 <a:ea typeface="Times New Roman" panose="02020603050405020304" pitchFamily="18" charset="0"/>
@@ -45355,7 +45765,7 @@
               </a:rPr>
               <a:t>Compromitere DB: y → x = DLP pe 2048 biți (nefezabil)</a:t>
             </a:r>
-            <a:endParaRPr lang="ro-RO" sz="2800" kern="100" dirty="0">
+            <a:endParaRPr lang="ro-RO" sz="1400" kern="100" dirty="0">
               <a:effectLst/>
               <a:latin typeface="Aptos" panose="020B0004020202020204" pitchFamily="34" charset="0"/>
               <a:ea typeface="Aptos" panose="020B0004020202020204" pitchFamily="34" charset="0"/>
@@ -47158,21 +47568,21 @@
 </file>
 
 <file path=customXml/item2.xml><?xml version="1.0" encoding="utf-8"?>
+<p:properties xmlns:p="http://schemas.microsoft.com/office/2006/metadata/properties" xmlns:xsi="http://www.w3.org/2001/XMLSchema-instance" xmlns:pc="http://schemas.microsoft.com/office/infopath/2007/PartnerControls">
+  <documentManagement>
+    <Status xmlns="71af3243-3dd4-4a8d-8c0d-dd76da1f02a5">Not started</Status>
+    <MediaServiceKeyPoints xmlns="71af3243-3dd4-4a8d-8c0d-dd76da1f02a5" xsi:nil="true"/>
+  </documentManagement>
+</p:properties>
+</file>
+
+<file path=customXml/item3.xml><?xml version="1.0" encoding="utf-8"?>
 <?mso-contentType ?>
 <FormTemplates xmlns="http://schemas.microsoft.com/sharepoint/v3/contenttype/forms">
   <Display>DocumentLibraryForm</Display>
   <Edit>DocumentLibraryForm</Edit>
   <New>DocumentLibraryForm</New>
 </FormTemplates>
-</file>
-
-<file path=customXml/item3.xml><?xml version="1.0" encoding="utf-8"?>
-<p:properties xmlns:p="http://schemas.microsoft.com/office/2006/metadata/properties" xmlns:xsi="http://www.w3.org/2001/XMLSchema-instance" xmlns:pc="http://schemas.microsoft.com/office/infopath/2007/PartnerControls">
-  <documentManagement>
-    <Status xmlns="71af3243-3dd4-4a8d-8c0d-dd76da1f02a5">Not started</Status>
-    <MediaServiceKeyPoints xmlns="71af3243-3dd4-4a8d-8c0d-dd76da1f02a5" xsi:nil="true"/>
-  </documentManagement>
-</p:properties>
 </file>
 
 <file path=customXml/itemProps1.xml><?xml version="1.0" encoding="utf-8"?>
@@ -47195,14 +47605,6 @@
 </file>
 
 <file path=customXml/itemProps2.xml><?xml version="1.0" encoding="utf-8"?>
-<ds:datastoreItem xmlns:ds="http://schemas.openxmlformats.org/officeDocument/2006/customXml" ds:itemID="{D8A49B05-820E-4F16-BCC1-12B2E13002E2}">
-  <ds:schemaRefs>
-    <ds:schemaRef ds:uri="http://schemas.microsoft.com/sharepoint/v3/contenttype/forms"/>
-  </ds:schemaRefs>
-</ds:datastoreItem>
-</file>
-
-<file path=customXml/itemProps3.xml><?xml version="1.0" encoding="utf-8"?>
 <ds:datastoreItem xmlns:ds="http://schemas.openxmlformats.org/officeDocument/2006/customXml" ds:itemID="{F2AD9EFA-E074-4C2F-8F25-BF862B8AB684}">
   <ds:schemaRefs>
     <ds:schemaRef ds:uri="http://schemas.microsoft.com/office/2006/metadata/properties"/>
@@ -47212,6 +47614,14 @@
 </ds:datastoreItem>
 </file>
 
+<file path=customXml/itemProps3.xml><?xml version="1.0" encoding="utf-8"?>
+<ds:datastoreItem xmlns:ds="http://schemas.openxmlformats.org/officeDocument/2006/customXml" ds:itemID="{D8A49B05-820E-4F16-BCC1-12B2E13002E2}">
+  <ds:schemaRefs>
+    <ds:schemaRef ds:uri="http://schemas.microsoft.com/sharepoint/v3/contenttype/forms"/>
+  </ds:schemaRefs>
+</ds:datastoreItem>
+</file>
+
 <file path=docMetadata/LabelInfo.xml><?xml version="1.0" encoding="utf-8"?>
 <clbl:labelList xmlns:clbl="http://schemas.microsoft.com/office/2020/mipLabelMetadata">
   <clbl:label id="{7e753c2c-bb14-4786-921b-97c6a6fc424f}" enabled="1" method="Standard" siteId="{3bd97919-57c3-48d3-9e9a-8e4c01614a8f}" contentBits="2" removed="0"/>
